--- a/dist/weeks-포트폴리오제작/포트폴리오제작_01주차_OT.pptx
+++ b/dist/weeks-포트폴리오제작/포트폴리오제작_01주차_OT.pptx
@@ -8522,7 +8522,7 @@
         <p:spPr>
           <a:xfrm>
             <a:off x="1353312" y="1755648"/>
-            <a:ext cx="4248760" cy="585216"/>
+            <a:ext cx="4267048" cy="585216"/>
           </a:xfrm>
           <a:prstGeom prst="rect">
             <a:avLst/>
@@ -8650,7 +8650,7 @@
         <p:spPr>
           <a:xfrm>
             <a:off x="1353312" y="2487168"/>
-            <a:ext cx="4248760" cy="585216"/>
+            <a:ext cx="4267048" cy="585216"/>
           </a:xfrm>
           <a:prstGeom prst="rect">
             <a:avLst/>
@@ -8778,7 +8778,7 @@
         <p:spPr>
           <a:xfrm>
             <a:off x="1353312" y="3218688"/>
-            <a:ext cx="4248760" cy="585216"/>
+            <a:ext cx="4267048" cy="585216"/>
           </a:xfrm>
           <a:prstGeom prst="rect">
             <a:avLst/>
@@ -8906,7 +8906,7 @@
         <p:spPr>
           <a:xfrm>
             <a:off x="1353312" y="3950208"/>
-            <a:ext cx="4248760" cy="585216"/>
+            <a:ext cx="4267048" cy="585216"/>
           </a:xfrm>
           <a:prstGeom prst="rect">
             <a:avLst/>
@@ -9034,7 +9034,7 @@
         <p:spPr>
           <a:xfrm>
             <a:off x="7010248" y="1755648"/>
-            <a:ext cx="4248760" cy="585216"/>
+            <a:ext cx="4267048" cy="585216"/>
           </a:xfrm>
           <a:prstGeom prst="rect">
             <a:avLst/>
@@ -9162,7 +9162,7 @@
         <p:spPr>
           <a:xfrm>
             <a:off x="7010248" y="2487168"/>
-            <a:ext cx="4248760" cy="585216"/>
+            <a:ext cx="4267048" cy="585216"/>
           </a:xfrm>
           <a:prstGeom prst="rect">
             <a:avLst/>
@@ -9290,7 +9290,7 @@
         <p:spPr>
           <a:xfrm>
             <a:off x="7010248" y="3218688"/>
-            <a:ext cx="4248760" cy="585216"/>
+            <a:ext cx="4267048" cy="585216"/>
           </a:xfrm>
           <a:prstGeom prst="rect">
             <a:avLst/>
@@ -9418,7 +9418,7 @@
         <p:spPr>
           <a:xfrm>
             <a:off x="7010248" y="3950208"/>
-            <a:ext cx="4248760" cy="585216"/>
+            <a:ext cx="4267048" cy="585216"/>
           </a:xfrm>
           <a:prstGeom prst="rect">
             <a:avLst/>
@@ -9456,7 +9456,7 @@
         </p:nvSpPr>
         <p:spPr>
           <a:xfrm>
-            <a:off x="640080" y="5468112"/>
+            <a:off x="640080" y="4736592"/>
             <a:ext cx="10911535" cy="7315"/>
           </a:xfrm>
           <a:prstGeom prst="rect">
@@ -9481,7 +9481,7 @@
         </p:nvSpPr>
         <p:spPr>
           <a:xfrm>
-            <a:off x="640080" y="5577840"/>
+            <a:off x="640080" y="4846320"/>
             <a:ext cx="10911535" cy="402336"/>
           </a:xfrm>
           <a:prstGeom prst="rect">

--- a/dist/weeks-포트폴리오제작/포트폴리오제작_01주차_OT.pptx
+++ b/dist/weeks-포트폴리오제작/포트폴리오제작_01주차_OT.pptx
@@ -21,9 +21,10 @@
     <p:sldId id="269" r:id="rId15"/>
     <p:sldId id="270" r:id="rId16"/>
     <p:sldId id="271" r:id="rId17"/>
+    <p:sldId id="272" r:id="rId18"/>
   </p:sldIdLst>
   <p:notesMasterIdLst>
-    <p:notesMasterId r:id="rId18"/>
+    <p:notesMasterId r:id="rId19"/>
   </p:notesMasterIdLst>
   <p:sldSz cx="12192000" cy="6858000"/>
   <p:notesSz cx="6858000" cy="12192000"/>
@@ -1045,7 +1046,7 @@
           <a:p>
             <a:r>
               <a:rPr lang="en-US" dirty="0"/>
-              <a:t>파일명 규칙을 첫 주에 정해두면 학기 내내 관리가 편하다.</a:t>
+              <a:t>이 실습이 없으면 과제를 '예뻐 보이는 것 3개'로 채워 온다. 수업 안에서 기준을 한 번 대보게 하면 2주차 자기 분석의 재료 수준이 달라진다. 온라인이므로 채팅창에 후보를 적게 하면 진행 상황이 바로 보인다.</a:t>
             </a:r>
             <a:endParaRPr lang="en-US" dirty="0"/>
           </a:p>
@@ -1133,7 +1134,7 @@
           <a:p>
             <a:r>
               <a:rPr lang="en-US" dirty="0"/>
-              <a:t>3개를 모두 비슷한 그래픽 포트폴리오로 골라오는 경우가 많다. 서로 다른 유형(웹형·PDF형·인쇄형 등)으로 고르라고 예시를 들어 지시할 것.</a:t>
+              <a:t>파일명 규칙을 첫 주에 정해두면 학기 내내 관리가 편하다.</a:t>
             </a:r>
             <a:endParaRPr lang="en-US" dirty="0"/>
           </a:p>
@@ -1157,6 +1158,94 @@
             <a:fld id="{F7021451-1387-4CA6-816F-3879F97B5CBC}" type="slidenum">
               <a:rPr lang="en-US"/>
               <a:t>16</a:t>
+            </a:fld>
+            <a:endParaRPr lang="en-US"/>
+          </a:p>
+        </p:txBody>
+      </p:sp>
+    </p:spTree>
+    <p:extLst>
+      <p:ext uri="{BB962C8B-B14F-4D97-AF65-F5344CB8AC3E}">
+        <p14:creationId xmlns:p14="http://schemas.microsoft.com/office/powerpoint/2010/main" val="1024086991"/>
+      </p:ext>
+    </p:extLst>
+  </p:cSld>
+  <p:clrMapOvr>
+    <a:masterClrMapping/>
+  </p:clrMapOvr>
+</p:notes>
+</file>
+
+<file path=ppt/notesSlides/notesSlide17.xml><?xml version="1.0" encoding="utf-8"?>
+<p:notes xmlns:a="http://schemas.openxmlformats.org/drawingml/2006/main" xmlns:r="http://schemas.openxmlformats.org/officeDocument/2006/relationships" xmlns:p="http://schemas.openxmlformats.org/presentationml/2006/main">
+  <p:cSld>
+    <p:spTree>
+      <p:nvGrpSpPr>
+        <p:cNvPr id="1" name=""/>
+        <p:cNvGrpSpPr/>
+        <p:nvPr/>
+      </p:nvGrpSpPr>
+      <p:grpSpPr>
+        <a:xfrm>
+          <a:off x="0" y="0"/>
+          <a:ext cx="0" cy="0"/>
+          <a:chOff x="0" y="0"/>
+          <a:chExt cx="0" cy="0"/>
+        </a:xfrm>
+      </p:grpSpPr>
+      <p:sp>
+        <p:nvSpPr>
+          <p:cNvPr id="2" name="Slide Image Placeholder 1"/>
+          <p:cNvSpPr>
+            <a:spLocks noGrp="1" noRot="1" noChangeAspect="1"/>
+          </p:cNvSpPr>
+          <p:nvPr>
+            <p:ph type="sldImg"/>
+          </p:nvPr>
+        </p:nvSpPr>
+        <p:spPr/>
+      </p:sp>
+      <p:sp>
+        <p:nvSpPr>
+          <p:cNvPr id="3" name="Notes Placeholder 2"/>
+          <p:cNvSpPr>
+            <a:spLocks noGrp="1"/>
+          </p:cNvSpPr>
+          <p:nvPr>
+            <p:ph type="body" idx="1"/>
+          </p:nvPr>
+        </p:nvSpPr>
+        <p:spPr/>
+        <p:txBody>
+          <a:bodyPr/>
+          <a:lstStyle/>
+          <a:p>
+            <a:r>
+              <a:rPr lang="en-US" dirty="0"/>
+              <a:t>3개를 모두 비슷한 그래픽 포트폴리오로 골라오는 경우가 많다. 서로 다른 유형(웹형·PDF형·인쇄형 등)으로 고르라고 예시를 들어 지시할 것.</a:t>
+            </a:r>
+            <a:endParaRPr lang="en-US" dirty="0"/>
+          </a:p>
+        </p:txBody>
+      </p:sp>
+      <p:sp>
+        <p:nvSpPr>
+          <p:cNvPr id="4" name="Slide Number Placeholder 3"/>
+          <p:cNvSpPr>
+            <a:spLocks noGrp="1"/>
+          </p:cNvSpPr>
+          <p:nvPr>
+            <p:ph type="sldNum" sz="quarter" idx="10"/>
+          </p:nvPr>
+        </p:nvSpPr>
+        <p:spPr/>
+        <p:txBody>
+          <a:bodyPr/>
+          <a:lstStyle/>
+          <a:p>
+            <a:fld id="{F7021451-1387-4CA6-816F-3879F97B5CBC}" type="slidenum">
+              <a:rPr lang="en-US"/>
+              <a:t>17</a:t>
             </a:fld>
             <a:endParaRPr lang="en-US"/>
           </a:p>
@@ -1221,7 +1310,7 @@
           <a:p>
             <a:r>
               <a:rPr lang="en-US" dirty="0"/>
-              <a:t>이 과목은 90분이다. 2주차부터 실습과 상담 비중이 커지므로, 첫 주에만 강의가 길다는 점을 미리 말해두면 좋다.</a:t>
+              <a:t>이 과목은 120분이며 온라인이다. 화면만 보는 시간이 길어지므로 중간 휴식 10분을 반드시 지키고, 실습 15분에는 채팅창에 후보를 적게 해 진행 상황을 눈으로 확인한다. 2주차부터 실습과 상담 비중이 커지므로, 첫 주에만 강의가 길다는 점을 미리 말해두면 좋다.</a:t>
             </a:r>
             <a:endParaRPr lang="en-US" dirty="0"/>
           </a:p>
@@ -2778,7 +2867,7 @@
                 <a:ea typeface="Pretendard" pitchFamily="34" charset="-122"/>
                 <a:cs typeface="Pretendard" pitchFamily="34" charset="-120"/>
               </a:rPr>
-              <a:t>90분 — OT 15분 · 강의 60분 · Q&amp;A 15분</a:t>
+              <a:t>120분 — OT 15분 · 강의 70분 · 실습 15분 · 안내와 Q&amp;A 10분</a:t>
             </a:r>
             <a:endParaRPr lang="en-US" sz="1200" dirty="0"/>
           </a:p>
@@ -8340,7 +8429,7 @@
                 <a:ea typeface="Pretendard" pitchFamily="34" charset="-122"/>
                 <a:cs typeface="Pretendard" pitchFamily="34" charset="-120"/>
               </a:rPr>
-              <a:t>HOMEWORK</a:t>
+              <a:t>WORKSHOP</a:t>
             </a:r>
             <a:endParaRPr lang="en-US" sz="950" dirty="0"/>
           </a:p>
@@ -8379,7 +8468,7 @@
                 <a:ea typeface="Pretendard Black" pitchFamily="34" charset="-122"/>
                 <a:cs typeface="Pretendard Black" pitchFamily="34" charset="-120"/>
               </a:rPr>
-              <a:t>스크랩 과제, 이렇게 하세요</a:t>
+              <a:t>실습 · 스크랩 후보 고르기</a:t>
             </a:r>
             <a:endParaRPr lang="en-US" sz="3000" dirty="0"/>
           </a:p>
@@ -8418,7 +8507,7 @@
                 <a:ea typeface="Pretendard" pitchFamily="34" charset="-122"/>
                 <a:cs typeface="Pretendard" pitchFamily="34" charset="-120"/>
               </a:rPr>
-              <a:t>다음 주 자기 분석의 재료가 됩니다. 대충 모으면 2주차가 헛돕니다.</a:t>
+              <a:t>15분 · 개인 — 과제를 집에서 처음부터 하지 않도록, 후보를 여기서 좁혀 놓고 갑니다.</a:t>
             </a:r>
             <a:endParaRPr lang="en-US" sz="1150" dirty="0"/>
           </a:p>
@@ -8432,18 +8521,18 @@
         </p:nvSpPr>
         <p:spPr>
           <a:xfrm>
-            <a:off x="640080" y="1755648"/>
-            <a:ext cx="5254600" cy="585216"/>
+            <a:off x="640080" y="1719072"/>
+            <a:ext cx="10911535" cy="822960"/>
           </a:xfrm>
           <a:prstGeom prst="rect">
             <a:avLst/>
           </a:prstGeom>
           <a:solidFill>
-            <a:srgbClr val="F2F2F2"/>
+            <a:srgbClr val="FFFFFF"/>
           </a:solidFill>
           <a:ln w="12700">
             <a:solidFill>
-              <a:srgbClr val="F2F2F2"/>
+              <a:srgbClr val="DCDCDC"/>
             </a:solidFill>
             <a:prstDash val="solid"/>
           </a:ln>
@@ -8451,24 +8540,144 @@
       </p:sp>
       <p:sp>
         <p:nvSpPr>
-          <p:cNvPr id="10" name="Shape 8"/>
-          <p:cNvSpPr/>
-          <p:nvPr/>
-        </p:nvSpPr>
-        <p:spPr>
-          <a:xfrm>
-            <a:off x="914400" y="1892808"/>
-            <a:ext cx="310896" cy="310896"/>
-          </a:xfrm>
-          <a:prstGeom prst="ellipse">
+          <p:cNvPr id="10" name="Text 8"/>
+          <p:cNvSpPr/>
+          <p:nvPr/>
+        </p:nvSpPr>
+        <p:spPr>
+          <a:xfrm>
+            <a:off x="1005840" y="1810512"/>
+            <a:ext cx="1188720" cy="640080"/>
+          </a:xfrm>
+          <a:prstGeom prst="rect">
+            <a:avLst/>
+          </a:prstGeom>
+          <a:noFill/>
+          <a:ln/>
+        </p:spPr>
+        <p:txBody>
+          <a:bodyPr wrap="square" lIns="0" tIns="0" rIns="0" bIns="0" rtlCol="0" anchor="ctr"/>
+          <a:lstStyle/>
+          <a:p>
+            <a:pPr indent="0" marL="0">
+              <a:buNone/>
+            </a:pPr>
+            <a:r>
+              <a:rPr lang="en-US" sz="2200" dirty="0">
+                <a:solidFill>
+                  <a:srgbClr val="111111"/>
+                </a:solidFill>
+                <a:latin typeface="Pretendard Light" pitchFamily="34" charset="0"/>
+                <a:ea typeface="Pretendard Light" pitchFamily="34" charset="-122"/>
+                <a:cs typeface="Pretendard Light" pitchFamily="34" charset="-120"/>
+              </a:rPr>
+              <a:t>5분</a:t>
+            </a:r>
+            <a:endParaRPr lang="en-US" sz="2200" dirty="0"/>
+          </a:p>
+        </p:txBody>
+      </p:sp>
+      <p:sp>
+        <p:nvSpPr>
+          <p:cNvPr id="11" name="Text 9"/>
+          <p:cNvSpPr/>
+          <p:nvPr/>
+        </p:nvSpPr>
+        <p:spPr>
+          <a:xfrm>
+            <a:off x="2286000" y="1810512"/>
+            <a:ext cx="3291840" cy="640080"/>
+          </a:xfrm>
+          <a:prstGeom prst="rect">
+            <a:avLst/>
+          </a:prstGeom>
+          <a:noFill/>
+          <a:ln/>
+        </p:spPr>
+        <p:txBody>
+          <a:bodyPr wrap="square" lIns="0" tIns="0" rIns="0" bIns="0" rtlCol="0" anchor="ctr"/>
+          <a:lstStyle/>
+          <a:p>
+            <a:pPr indent="0" marL="0">
+              <a:buNone/>
+            </a:pPr>
+            <a:r>
+              <a:rPr lang="en-US" sz="1450" dirty="0">
+                <a:solidFill>
+                  <a:srgbClr val="111111"/>
+                </a:solidFill>
+                <a:latin typeface="Pretendard Black" pitchFamily="34" charset="0"/>
+                <a:ea typeface="Pretendard Black" pitchFamily="34" charset="-122"/>
+                <a:cs typeface="Pretendard Black" pitchFamily="34" charset="-120"/>
+              </a:rPr>
+              <a:t>흩뿌리기</a:t>
+            </a:r>
+            <a:endParaRPr lang="en-US" sz="1450" dirty="0"/>
+          </a:p>
+        </p:txBody>
+      </p:sp>
+      <p:sp>
+        <p:nvSpPr>
+          <p:cNvPr id="12" name="Text 10"/>
+          <p:cNvSpPr/>
+          <p:nvPr/>
+        </p:nvSpPr>
+        <p:spPr>
+          <a:xfrm>
+            <a:off x="5669280" y="1810512"/>
+            <a:ext cx="5516575" cy="640080"/>
+          </a:xfrm>
+          <a:prstGeom prst="rect">
+            <a:avLst/>
+          </a:prstGeom>
+          <a:noFill/>
+          <a:ln/>
+        </p:spPr>
+        <p:txBody>
+          <a:bodyPr wrap="square" lIns="0" tIns="0" rIns="0" bIns="0" rtlCol="0" anchor="ctr"/>
+          <a:lstStyle/>
+          <a:p>
+            <a:pPr indent="0" marL="0">
+              <a:lnSpc>
+                <a:spcPct val="124000"/>
+              </a:lnSpc>
+              <a:buNone/>
+            </a:pPr>
+            <a:r>
+              <a:rPr lang="en-US" sz="1150" dirty="0">
+                <a:solidFill>
+                  <a:srgbClr val="6E6E6E"/>
+                </a:solidFill>
+                <a:latin typeface="Pretendard" pitchFamily="34" charset="0"/>
+                <a:ea typeface="Pretendard" pitchFamily="34" charset="-122"/>
+                <a:cs typeface="Pretendard" pitchFamily="34" charset="-120"/>
+              </a:rPr>
+              <a:t>지금까지 본 포트폴리오 중 기억에 남는 것을 이름이나 링크로 8개 이상 적습니다. 좋았는지 나빴는지는 아직 따지지 않습니다. 기억이 안 나면 오늘 본 플랫폼에서 바로 찾아도 됩니다.</a:t>
+            </a:r>
+            <a:endParaRPr lang="en-US" sz="1150" dirty="0"/>
+          </a:p>
+        </p:txBody>
+      </p:sp>
+      <p:sp>
+        <p:nvSpPr>
+          <p:cNvPr id="13" name="Shape 11"/>
+          <p:cNvSpPr/>
+          <p:nvPr/>
+        </p:nvSpPr>
+        <p:spPr>
+          <a:xfrm>
+            <a:off x="640080" y="2688336"/>
+            <a:ext cx="10911535" cy="822960"/>
+          </a:xfrm>
+          <a:prstGeom prst="rect">
             <a:avLst/>
           </a:prstGeom>
           <a:solidFill>
-            <a:srgbClr val="F2F2F2"/>
+            <a:srgbClr val="FFFFFF"/>
           </a:solidFill>
           <a:ln w="12700">
             <a:solidFill>
-              <a:srgbClr val="111111"/>
+              <a:srgbClr val="DCDCDC"/>
             </a:solidFill>
             <a:prstDash val="solid"/>
           </a:ln>
@@ -8476,102 +8685,144 @@
       </p:sp>
       <p:sp>
         <p:nvSpPr>
-          <p:cNvPr id="11" name="Text 9"/>
-          <p:cNvSpPr/>
-          <p:nvPr/>
-        </p:nvSpPr>
-        <p:spPr>
-          <a:xfrm>
-            <a:off x="914400" y="1892808"/>
-            <a:ext cx="310896" cy="310896"/>
-          </a:xfrm>
-          <a:prstGeom prst="rect">
-            <a:avLst/>
-          </a:prstGeom>
-          <a:noFill/>
-          <a:ln/>
-        </p:spPr>
-        <p:txBody>
-          <a:bodyPr wrap="square" lIns="0" tIns="0" rIns="0" bIns="0" rtlCol="0" anchor="ctr"/>
-          <a:lstStyle/>
-          <a:p>
-            <a:pPr algn="ctr" indent="0" marL="0">
-              <a:buNone/>
-            </a:pPr>
-            <a:r>
-              <a:rPr lang="en-US" sz="900" b="1" dirty="0">
+          <p:cNvPr id="14" name="Text 12"/>
+          <p:cNvSpPr/>
+          <p:nvPr/>
+        </p:nvSpPr>
+        <p:spPr>
+          <a:xfrm>
+            <a:off x="1005840" y="2779776"/>
+            <a:ext cx="1188720" cy="640080"/>
+          </a:xfrm>
+          <a:prstGeom prst="rect">
+            <a:avLst/>
+          </a:prstGeom>
+          <a:noFill/>
+          <a:ln/>
+        </p:spPr>
+        <p:txBody>
+          <a:bodyPr wrap="square" lIns="0" tIns="0" rIns="0" bIns="0" rtlCol="0" anchor="ctr"/>
+          <a:lstStyle/>
+          <a:p>
+            <a:pPr indent="0" marL="0">
+              <a:buNone/>
+            </a:pPr>
+            <a:r>
+              <a:rPr lang="en-US" sz="2200" dirty="0">
                 <a:solidFill>
                   <a:srgbClr val="111111"/>
                 </a:solidFill>
-                <a:latin typeface="Pretendard" pitchFamily="34" charset="0"/>
-                <a:ea typeface="Pretendard" pitchFamily="34" charset="-122"/>
-                <a:cs typeface="Pretendard" pitchFamily="34" charset="-120"/>
-              </a:rPr>
-              <a:t>01</a:t>
-            </a:r>
-            <a:endParaRPr lang="en-US" sz="900" dirty="0"/>
-          </a:p>
-        </p:txBody>
-      </p:sp>
-      <p:sp>
-        <p:nvSpPr>
-          <p:cNvPr id="12" name="Text 10"/>
-          <p:cNvSpPr/>
-          <p:nvPr/>
-        </p:nvSpPr>
-        <p:spPr>
-          <a:xfrm>
-            <a:off x="1353312" y="1755648"/>
-            <a:ext cx="4267048" cy="585216"/>
-          </a:xfrm>
-          <a:prstGeom prst="rect">
-            <a:avLst/>
-          </a:prstGeom>
-          <a:noFill/>
-          <a:ln/>
-        </p:spPr>
-        <p:txBody>
-          <a:bodyPr wrap="square" lIns="0" tIns="0" rIns="0" bIns="0" rtlCol="0" anchor="ctr"/>
-          <a:lstStyle/>
-          <a:p>
-            <a:pPr indent="0" marL="0">
-              <a:buNone/>
-            </a:pPr>
-            <a:r>
-              <a:rPr lang="en-US" sz="1200" dirty="0">
+                <a:latin typeface="Pretendard Light" pitchFamily="34" charset="0"/>
+                <a:ea typeface="Pretendard Light" pitchFamily="34" charset="-122"/>
+                <a:cs typeface="Pretendard Light" pitchFamily="34" charset="-120"/>
+              </a:rPr>
+              <a:t>4분</a:t>
+            </a:r>
+            <a:endParaRPr lang="en-US" sz="2200" dirty="0"/>
+          </a:p>
+        </p:txBody>
+      </p:sp>
+      <p:sp>
+        <p:nvSpPr>
+          <p:cNvPr id="15" name="Text 13"/>
+          <p:cNvSpPr/>
+          <p:nvPr/>
+        </p:nvSpPr>
+        <p:spPr>
+          <a:xfrm>
+            <a:off x="2286000" y="2779776"/>
+            <a:ext cx="3291840" cy="640080"/>
+          </a:xfrm>
+          <a:prstGeom prst="rect">
+            <a:avLst/>
+          </a:prstGeom>
+          <a:noFill/>
+          <a:ln/>
+        </p:spPr>
+        <p:txBody>
+          <a:bodyPr wrap="square" lIns="0" tIns="0" rIns="0" bIns="0" rtlCol="0" anchor="ctr"/>
+          <a:lstStyle/>
+          <a:p>
+            <a:pPr indent="0" marL="0">
+              <a:buNone/>
+            </a:pPr>
+            <a:r>
+              <a:rPr lang="en-US" sz="1450" dirty="0">
                 <a:solidFill>
                   <a:srgbClr val="111111"/>
                 </a:solidFill>
-                <a:latin typeface="Pretendard" pitchFamily="34" charset="0"/>
-                <a:ea typeface="Pretendard" pitchFamily="34" charset="-122"/>
-                <a:cs typeface="Pretendard" pitchFamily="34" charset="-120"/>
-              </a:rPr>
-              <a:t>관심 분야의 포트폴리오 3개를 고른다</a:t>
-            </a:r>
-            <a:endParaRPr lang="en-US" sz="1200" dirty="0"/>
-          </a:p>
-        </p:txBody>
-      </p:sp>
-      <p:sp>
-        <p:nvSpPr>
-          <p:cNvPr id="13" name="Shape 11"/>
-          <p:cNvSpPr/>
-          <p:nvPr/>
-        </p:nvSpPr>
-        <p:spPr>
-          <a:xfrm>
-            <a:off x="640080" y="2487168"/>
-            <a:ext cx="5254600" cy="585216"/>
+                <a:latin typeface="Pretendard Black" pitchFamily="34" charset="0"/>
+                <a:ea typeface="Pretendard Black" pitchFamily="34" charset="-122"/>
+                <a:cs typeface="Pretendard Black" pitchFamily="34" charset="-120"/>
+              </a:rPr>
+              <a:t>유형 나누기</a:t>
+            </a:r>
+            <a:endParaRPr lang="en-US" sz="1450" dirty="0"/>
+          </a:p>
+        </p:txBody>
+      </p:sp>
+      <p:sp>
+        <p:nvSpPr>
+          <p:cNvPr id="16" name="Text 14"/>
+          <p:cNvSpPr/>
+          <p:nvPr/>
+        </p:nvSpPr>
+        <p:spPr>
+          <a:xfrm>
+            <a:off x="5669280" y="2779776"/>
+            <a:ext cx="5516575" cy="640080"/>
+          </a:xfrm>
+          <a:prstGeom prst="rect">
+            <a:avLst/>
+          </a:prstGeom>
+          <a:noFill/>
+          <a:ln/>
+        </p:spPr>
+        <p:txBody>
+          <a:bodyPr wrap="square" lIns="0" tIns="0" rIns="0" bIns="0" rtlCol="0" anchor="ctr"/>
+          <a:lstStyle/>
+          <a:p>
+            <a:pPr indent="0" marL="0">
+              <a:lnSpc>
+                <a:spcPct val="124000"/>
+              </a:lnSpc>
+              <a:buNone/>
+            </a:pPr>
+            <a:r>
+              <a:rPr lang="en-US" sz="1150" dirty="0">
+                <a:solidFill>
+                  <a:srgbClr val="6E6E6E"/>
+                </a:solidFill>
+                <a:latin typeface="Pretendard" pitchFamily="34" charset="0"/>
+                <a:ea typeface="Pretendard" pitchFamily="34" charset="-122"/>
+                <a:cs typeface="Pretendard" pitchFamily="34" charset="-120"/>
+              </a:rPr>
+              <a:t>웹형 · PDF형 · 인쇄형 셋으로 나눕니다. 한 유형에만 몰려 있으면 다른 유형을 지금 두 개 더 찾습니다. 세 유형이 섞여야 다음 주 비교가 됩니다.</a:t>
+            </a:r>
+            <a:endParaRPr lang="en-US" sz="1150" dirty="0"/>
+          </a:p>
+        </p:txBody>
+      </p:sp>
+      <p:sp>
+        <p:nvSpPr>
+          <p:cNvPr id="17" name="Shape 15"/>
+          <p:cNvSpPr/>
+          <p:nvPr/>
+        </p:nvSpPr>
+        <p:spPr>
+          <a:xfrm>
+            <a:off x="640080" y="3657600"/>
+            <a:ext cx="10911535" cy="822960"/>
           </a:xfrm>
           <a:prstGeom prst="rect">
             <a:avLst/>
           </a:prstGeom>
           <a:solidFill>
-            <a:srgbClr val="F2F2F2"/>
+            <a:srgbClr val="FFFFFF"/>
           </a:solidFill>
           <a:ln w="12700">
             <a:solidFill>
-              <a:srgbClr val="F2F2F2"/>
+              <a:srgbClr val="DCDCDC"/>
             </a:solidFill>
             <a:prstDash val="solid"/>
           </a:ln>
@@ -8579,193 +8830,79 @@
       </p:sp>
       <p:sp>
         <p:nvSpPr>
-          <p:cNvPr id="14" name="Shape 12"/>
-          <p:cNvSpPr/>
-          <p:nvPr/>
-        </p:nvSpPr>
-        <p:spPr>
-          <a:xfrm>
-            <a:off x="914400" y="2624328"/>
-            <a:ext cx="310896" cy="310896"/>
-          </a:xfrm>
-          <a:prstGeom prst="ellipse">
-            <a:avLst/>
-          </a:prstGeom>
-          <a:solidFill>
-            <a:srgbClr val="F2F2F2"/>
-          </a:solidFill>
-          <a:ln w="12700">
-            <a:solidFill>
-              <a:srgbClr val="111111"/>
-            </a:solidFill>
-            <a:prstDash val="solid"/>
-          </a:ln>
-        </p:spPr>
-      </p:sp>
-      <p:sp>
-        <p:nvSpPr>
-          <p:cNvPr id="15" name="Text 13"/>
-          <p:cNvSpPr/>
-          <p:nvPr/>
-        </p:nvSpPr>
-        <p:spPr>
-          <a:xfrm>
-            <a:off x="914400" y="2624328"/>
-            <a:ext cx="310896" cy="310896"/>
-          </a:xfrm>
-          <a:prstGeom prst="rect">
-            <a:avLst/>
-          </a:prstGeom>
-          <a:noFill/>
-          <a:ln/>
-        </p:spPr>
-        <p:txBody>
-          <a:bodyPr wrap="square" lIns="0" tIns="0" rIns="0" bIns="0" rtlCol="0" anchor="ctr"/>
-          <a:lstStyle/>
-          <a:p>
-            <a:pPr algn="ctr" indent="0" marL="0">
-              <a:buNone/>
-            </a:pPr>
-            <a:r>
-              <a:rPr lang="en-US" sz="900" b="1" dirty="0">
+          <p:cNvPr id="18" name="Text 16"/>
+          <p:cNvSpPr/>
+          <p:nvPr/>
+        </p:nvSpPr>
+        <p:spPr>
+          <a:xfrm>
+            <a:off x="1005840" y="3749040"/>
+            <a:ext cx="1188720" cy="640080"/>
+          </a:xfrm>
+          <a:prstGeom prst="rect">
+            <a:avLst/>
+          </a:prstGeom>
+          <a:noFill/>
+          <a:ln/>
+        </p:spPr>
+        <p:txBody>
+          <a:bodyPr wrap="square" lIns="0" tIns="0" rIns="0" bIns="0" rtlCol="0" anchor="ctr"/>
+          <a:lstStyle/>
+          <a:p>
+            <a:pPr indent="0" marL="0">
+              <a:buNone/>
+            </a:pPr>
+            <a:r>
+              <a:rPr lang="en-US" sz="2200" dirty="0">
                 <a:solidFill>
                   <a:srgbClr val="111111"/>
                 </a:solidFill>
-                <a:latin typeface="Pretendard" pitchFamily="34" charset="0"/>
-                <a:ea typeface="Pretendard" pitchFamily="34" charset="-122"/>
-                <a:cs typeface="Pretendard" pitchFamily="34" charset="-120"/>
-              </a:rPr>
-              <a:t>02</a:t>
-            </a:r>
-            <a:endParaRPr lang="en-US" sz="900" dirty="0"/>
-          </a:p>
-        </p:txBody>
-      </p:sp>
-      <p:sp>
-        <p:nvSpPr>
-          <p:cNvPr id="16" name="Text 14"/>
-          <p:cNvSpPr/>
-          <p:nvPr/>
-        </p:nvSpPr>
-        <p:spPr>
-          <a:xfrm>
-            <a:off x="1353312" y="2487168"/>
-            <a:ext cx="4267048" cy="585216"/>
-          </a:xfrm>
-          <a:prstGeom prst="rect">
-            <a:avLst/>
-          </a:prstGeom>
-          <a:noFill/>
-          <a:ln/>
-        </p:spPr>
-        <p:txBody>
-          <a:bodyPr wrap="square" lIns="0" tIns="0" rIns="0" bIns="0" rtlCol="0" anchor="ctr"/>
-          <a:lstStyle/>
-          <a:p>
-            <a:pPr indent="0" marL="0">
-              <a:buNone/>
-            </a:pPr>
-            <a:r>
-              <a:rPr lang="en-US" sz="1200" dirty="0">
+                <a:latin typeface="Pretendard Light" pitchFamily="34" charset="0"/>
+                <a:ea typeface="Pretendard Light" pitchFamily="34" charset="-122"/>
+                <a:cs typeface="Pretendard Light" pitchFamily="34" charset="-120"/>
+              </a:rPr>
+              <a:t>4분</a:t>
+            </a:r>
+            <a:endParaRPr lang="en-US" sz="2200" dirty="0"/>
+          </a:p>
+        </p:txBody>
+      </p:sp>
+      <p:sp>
+        <p:nvSpPr>
+          <p:cNvPr id="19" name="Text 17"/>
+          <p:cNvSpPr/>
+          <p:nvPr/>
+        </p:nvSpPr>
+        <p:spPr>
+          <a:xfrm>
+            <a:off x="2286000" y="3749040"/>
+            <a:ext cx="3291840" cy="640080"/>
+          </a:xfrm>
+          <a:prstGeom prst="rect">
+            <a:avLst/>
+          </a:prstGeom>
+          <a:noFill/>
+          <a:ln/>
+        </p:spPr>
+        <p:txBody>
+          <a:bodyPr wrap="square" lIns="0" tIns="0" rIns="0" bIns="0" rtlCol="0" anchor="ctr"/>
+          <a:lstStyle/>
+          <a:p>
+            <a:pPr indent="0" marL="0">
+              <a:buNone/>
+            </a:pPr>
+            <a:r>
+              <a:rPr lang="en-US" sz="1450" dirty="0">
                 <a:solidFill>
                   <a:srgbClr val="111111"/>
                 </a:solidFill>
-                <a:latin typeface="Pretendard" pitchFamily="34" charset="0"/>
-                <a:ea typeface="Pretendard" pitchFamily="34" charset="-122"/>
-                <a:cs typeface="Pretendard" pitchFamily="34" charset="-120"/>
-              </a:rPr>
-              <a:t>셋을 서로 다른 유형으로 고른다 (웹형 · PDF형 · 인쇄형 등)</a:t>
-            </a:r>
-            <a:endParaRPr lang="en-US" sz="1200" dirty="0"/>
-          </a:p>
-        </p:txBody>
-      </p:sp>
-      <p:sp>
-        <p:nvSpPr>
-          <p:cNvPr id="17" name="Shape 15"/>
-          <p:cNvSpPr/>
-          <p:nvPr/>
-        </p:nvSpPr>
-        <p:spPr>
-          <a:xfrm>
-            <a:off x="640080" y="3218688"/>
-            <a:ext cx="5254600" cy="585216"/>
-          </a:xfrm>
-          <a:prstGeom prst="rect">
-            <a:avLst/>
-          </a:prstGeom>
-          <a:solidFill>
-            <a:srgbClr val="F2F2F2"/>
-          </a:solidFill>
-          <a:ln w="12700">
-            <a:solidFill>
-              <a:srgbClr val="F2F2F2"/>
-            </a:solidFill>
-            <a:prstDash val="solid"/>
-          </a:ln>
-        </p:spPr>
-      </p:sp>
-      <p:sp>
-        <p:nvSpPr>
-          <p:cNvPr id="18" name="Shape 16"/>
-          <p:cNvSpPr/>
-          <p:nvPr/>
-        </p:nvSpPr>
-        <p:spPr>
-          <a:xfrm>
-            <a:off x="914400" y="3355848"/>
-            <a:ext cx="310896" cy="310896"/>
-          </a:xfrm>
-          <a:prstGeom prst="ellipse">
-            <a:avLst/>
-          </a:prstGeom>
-          <a:solidFill>
-            <a:srgbClr val="F2F2F2"/>
-          </a:solidFill>
-          <a:ln w="12700">
-            <a:solidFill>
-              <a:srgbClr val="111111"/>
-            </a:solidFill>
-            <a:prstDash val="solid"/>
-          </a:ln>
-        </p:spPr>
-      </p:sp>
-      <p:sp>
-        <p:nvSpPr>
-          <p:cNvPr id="19" name="Text 17"/>
-          <p:cNvSpPr/>
-          <p:nvPr/>
-        </p:nvSpPr>
-        <p:spPr>
-          <a:xfrm>
-            <a:off x="914400" y="3355848"/>
-            <a:ext cx="310896" cy="310896"/>
-          </a:xfrm>
-          <a:prstGeom prst="rect">
-            <a:avLst/>
-          </a:prstGeom>
-          <a:noFill/>
-          <a:ln/>
-        </p:spPr>
-        <p:txBody>
-          <a:bodyPr wrap="square" lIns="0" tIns="0" rIns="0" bIns="0" rtlCol="0" anchor="ctr"/>
-          <a:lstStyle/>
-          <a:p>
-            <a:pPr algn="ctr" indent="0" marL="0">
-              <a:buNone/>
-            </a:pPr>
-            <a:r>
-              <a:rPr lang="en-US" sz="900" b="1" dirty="0">
-                <a:solidFill>
-                  <a:srgbClr val="111111"/>
-                </a:solidFill>
-                <a:latin typeface="Pretendard" pitchFamily="34" charset="0"/>
-                <a:ea typeface="Pretendard" pitchFamily="34" charset="-122"/>
-                <a:cs typeface="Pretendard" pitchFamily="34" charset="-120"/>
-              </a:rPr>
-              <a:t>03</a:t>
-            </a:r>
-            <a:endParaRPr lang="en-US" sz="900" dirty="0"/>
+                <a:latin typeface="Pretendard Black" pitchFamily="34" charset="0"/>
+                <a:ea typeface="Pretendard Black" pitchFamily="34" charset="-122"/>
+                <a:cs typeface="Pretendard Black" pitchFamily="34" charset="-120"/>
+              </a:rPr>
+              <a:t>오늘 기준으로 대보기</a:t>
+            </a:r>
+            <a:endParaRPr lang="en-US" sz="1450" dirty="0"/>
           </a:p>
         </p:txBody>
       </p:sp>
@@ -8777,34 +8914,37 @@
         </p:nvSpPr>
         <p:spPr>
           <a:xfrm>
-            <a:off x="1353312" y="3218688"/>
-            <a:ext cx="4267048" cy="585216"/>
-          </a:xfrm>
-          <a:prstGeom prst="rect">
-            <a:avLst/>
-          </a:prstGeom>
-          <a:noFill/>
-          <a:ln/>
-        </p:spPr>
-        <p:txBody>
-          <a:bodyPr wrap="square" lIns="0" tIns="0" rIns="0" bIns="0" rtlCol="0" anchor="ctr"/>
-          <a:lstStyle/>
-          <a:p>
-            <a:pPr indent="0" marL="0">
-              <a:buNone/>
-            </a:pPr>
-            <a:r>
-              <a:rPr lang="en-US" sz="1200" dirty="0">
-                <a:solidFill>
-                  <a:srgbClr val="111111"/>
-                </a:solidFill>
-                <a:latin typeface="Pretendard" pitchFamily="34" charset="0"/>
-                <a:ea typeface="Pretendard" pitchFamily="34" charset="-122"/>
-                <a:cs typeface="Pretendard" pitchFamily="34" charset="-120"/>
-              </a:rPr>
-              <a:t>각각 링크와 첫 화면 캡처를 남긴다</a:t>
-            </a:r>
-            <a:endParaRPr lang="en-US" sz="1200" dirty="0"/>
+            <a:off x="5669280" y="3749040"/>
+            <a:ext cx="5516575" cy="640080"/>
+          </a:xfrm>
+          <a:prstGeom prst="rect">
+            <a:avLst/>
+          </a:prstGeom>
+          <a:noFill/>
+          <a:ln/>
+        </p:spPr>
+        <p:txBody>
+          <a:bodyPr wrap="square" lIns="0" tIns="0" rIns="0" bIns="0" rtlCol="0" anchor="ctr"/>
+          <a:lstStyle/>
+          <a:p>
+            <a:pPr indent="0" marL="0">
+              <a:lnSpc>
+                <a:spcPct val="124000"/>
+              </a:lnSpc>
+              <a:buNone/>
+            </a:pPr>
+            <a:r>
+              <a:rPr lang="en-US" sz="1150" dirty="0">
+                <a:solidFill>
+                  <a:srgbClr val="6E6E6E"/>
+                </a:solidFill>
+                <a:latin typeface="Pretendard" pitchFamily="34" charset="0"/>
+                <a:ea typeface="Pretendard" pitchFamily="34" charset="-122"/>
+                <a:cs typeface="Pretendard" pitchFamily="34" charset="-120"/>
+              </a:rPr>
+              <a:t>오늘 배운 세 기준 — 첫인상 · 과정이 보이는가 · 내 역할이 적혀 있는가 — 로 후보마다 O/X를 칩니다. 세 개 다 X인 것은 지웁니다.</a:t>
+            </a:r>
+            <a:endParaRPr lang="en-US" sz="1150" dirty="0"/>
           </a:p>
         </p:txBody>
       </p:sp>
@@ -8816,648 +8956,8 @@
         </p:nvSpPr>
         <p:spPr>
           <a:xfrm>
-            <a:off x="640080" y="3950208"/>
-            <a:ext cx="5254600" cy="585216"/>
-          </a:xfrm>
-          <a:prstGeom prst="rect">
-            <a:avLst/>
-          </a:prstGeom>
-          <a:solidFill>
-            <a:srgbClr val="F2F2F2"/>
-          </a:solidFill>
-          <a:ln w="12700">
-            <a:solidFill>
-              <a:srgbClr val="F2F2F2"/>
-            </a:solidFill>
-            <a:prstDash val="solid"/>
-          </a:ln>
-        </p:spPr>
-      </p:sp>
-      <p:sp>
-        <p:nvSpPr>
-          <p:cNvPr id="22" name="Shape 20"/>
-          <p:cNvSpPr/>
-          <p:nvPr/>
-        </p:nvSpPr>
-        <p:spPr>
-          <a:xfrm>
-            <a:off x="914400" y="4087368"/>
-            <a:ext cx="310896" cy="310896"/>
-          </a:xfrm>
-          <a:prstGeom prst="ellipse">
-            <a:avLst/>
-          </a:prstGeom>
-          <a:solidFill>
-            <a:srgbClr val="F2F2F2"/>
-          </a:solidFill>
-          <a:ln w="12700">
-            <a:solidFill>
-              <a:srgbClr val="111111"/>
-            </a:solidFill>
-            <a:prstDash val="solid"/>
-          </a:ln>
-        </p:spPr>
-      </p:sp>
-      <p:sp>
-        <p:nvSpPr>
-          <p:cNvPr id="23" name="Text 21"/>
-          <p:cNvSpPr/>
-          <p:nvPr/>
-        </p:nvSpPr>
-        <p:spPr>
-          <a:xfrm>
-            <a:off x="914400" y="4087368"/>
-            <a:ext cx="310896" cy="310896"/>
-          </a:xfrm>
-          <a:prstGeom prst="rect">
-            <a:avLst/>
-          </a:prstGeom>
-          <a:noFill/>
-          <a:ln/>
-        </p:spPr>
-        <p:txBody>
-          <a:bodyPr wrap="square" lIns="0" tIns="0" rIns="0" bIns="0" rtlCol="0" anchor="ctr"/>
-          <a:lstStyle/>
-          <a:p>
-            <a:pPr algn="ctr" indent="0" marL="0">
-              <a:buNone/>
-            </a:pPr>
-            <a:r>
-              <a:rPr lang="en-US" sz="900" b="1" dirty="0">
-                <a:solidFill>
-                  <a:srgbClr val="111111"/>
-                </a:solidFill>
-                <a:latin typeface="Pretendard" pitchFamily="34" charset="0"/>
-                <a:ea typeface="Pretendard" pitchFamily="34" charset="-122"/>
-                <a:cs typeface="Pretendard" pitchFamily="34" charset="-120"/>
-              </a:rPr>
-              <a:t>04</a:t>
-            </a:r>
-            <a:endParaRPr lang="en-US" sz="900" dirty="0"/>
-          </a:p>
-        </p:txBody>
-      </p:sp>
-      <p:sp>
-        <p:nvSpPr>
-          <p:cNvPr id="24" name="Text 22"/>
-          <p:cNvSpPr/>
-          <p:nvPr/>
-        </p:nvSpPr>
-        <p:spPr>
-          <a:xfrm>
-            <a:off x="1353312" y="3950208"/>
-            <a:ext cx="4267048" cy="585216"/>
-          </a:xfrm>
-          <a:prstGeom prst="rect">
-            <a:avLst/>
-          </a:prstGeom>
-          <a:noFill/>
-          <a:ln/>
-        </p:spPr>
-        <p:txBody>
-          <a:bodyPr wrap="square" lIns="0" tIns="0" rIns="0" bIns="0" rtlCol="0" anchor="ctr"/>
-          <a:lstStyle/>
-          <a:p>
-            <a:pPr indent="0" marL="0">
-              <a:buNone/>
-            </a:pPr>
-            <a:r>
-              <a:rPr lang="en-US" sz="1200" dirty="0">
-                <a:solidFill>
-                  <a:srgbClr val="111111"/>
-                </a:solidFill>
-                <a:latin typeface="Pretendard" pitchFamily="34" charset="0"/>
-                <a:ea typeface="Pretendard" pitchFamily="34" charset="-122"/>
-                <a:cs typeface="Pretendard" pitchFamily="34" charset="-120"/>
-              </a:rPr>
-              <a:t>무엇이 좋았는지 한 줄씩 적는다</a:t>
-            </a:r>
-            <a:endParaRPr lang="en-US" sz="1200" dirty="0"/>
-          </a:p>
-        </p:txBody>
-      </p:sp>
-      <p:sp>
-        <p:nvSpPr>
-          <p:cNvPr id="25" name="Shape 23"/>
-          <p:cNvSpPr/>
-          <p:nvPr/>
-        </p:nvSpPr>
-        <p:spPr>
-          <a:xfrm>
-            <a:off x="6297016" y="1755648"/>
-            <a:ext cx="5254600" cy="585216"/>
-          </a:xfrm>
-          <a:prstGeom prst="rect">
-            <a:avLst/>
-          </a:prstGeom>
-          <a:solidFill>
-            <a:srgbClr val="F2F2F2"/>
-          </a:solidFill>
-          <a:ln w="12700">
-            <a:solidFill>
-              <a:srgbClr val="F2F2F2"/>
-            </a:solidFill>
-            <a:prstDash val="solid"/>
-          </a:ln>
-        </p:spPr>
-      </p:sp>
-      <p:sp>
-        <p:nvSpPr>
-          <p:cNvPr id="26" name="Shape 24"/>
-          <p:cNvSpPr/>
-          <p:nvPr/>
-        </p:nvSpPr>
-        <p:spPr>
-          <a:xfrm>
-            <a:off x="6571336" y="1892808"/>
-            <a:ext cx="310896" cy="310896"/>
-          </a:xfrm>
-          <a:prstGeom prst="ellipse">
-            <a:avLst/>
-          </a:prstGeom>
-          <a:solidFill>
-            <a:srgbClr val="F2F2F2"/>
-          </a:solidFill>
-          <a:ln w="12700">
-            <a:solidFill>
-              <a:srgbClr val="111111"/>
-            </a:solidFill>
-            <a:prstDash val="solid"/>
-          </a:ln>
-        </p:spPr>
-      </p:sp>
-      <p:sp>
-        <p:nvSpPr>
-          <p:cNvPr id="27" name="Text 25"/>
-          <p:cNvSpPr/>
-          <p:nvPr/>
-        </p:nvSpPr>
-        <p:spPr>
-          <a:xfrm>
-            <a:off x="6571336" y="1892808"/>
-            <a:ext cx="310896" cy="310896"/>
-          </a:xfrm>
-          <a:prstGeom prst="rect">
-            <a:avLst/>
-          </a:prstGeom>
-          <a:noFill/>
-          <a:ln/>
-        </p:spPr>
-        <p:txBody>
-          <a:bodyPr wrap="square" lIns="0" tIns="0" rIns="0" bIns="0" rtlCol="0" anchor="ctr"/>
-          <a:lstStyle/>
-          <a:p>
-            <a:pPr algn="ctr" indent="0" marL="0">
-              <a:buNone/>
-            </a:pPr>
-            <a:r>
-              <a:rPr lang="en-US" sz="900" b="1" dirty="0">
-                <a:solidFill>
-                  <a:srgbClr val="111111"/>
-                </a:solidFill>
-                <a:latin typeface="Pretendard" pitchFamily="34" charset="0"/>
-                <a:ea typeface="Pretendard" pitchFamily="34" charset="-122"/>
-                <a:cs typeface="Pretendard" pitchFamily="34" charset="-120"/>
-              </a:rPr>
-              <a:t>05</a:t>
-            </a:r>
-            <a:endParaRPr lang="en-US" sz="900" dirty="0"/>
-          </a:p>
-        </p:txBody>
-      </p:sp>
-      <p:sp>
-        <p:nvSpPr>
-          <p:cNvPr id="28" name="Text 26"/>
-          <p:cNvSpPr/>
-          <p:nvPr/>
-        </p:nvSpPr>
-        <p:spPr>
-          <a:xfrm>
-            <a:off x="7010248" y="1755648"/>
-            <a:ext cx="4267048" cy="585216"/>
-          </a:xfrm>
-          <a:prstGeom prst="rect">
-            <a:avLst/>
-          </a:prstGeom>
-          <a:noFill/>
-          <a:ln/>
-        </p:spPr>
-        <p:txBody>
-          <a:bodyPr wrap="square" lIns="0" tIns="0" rIns="0" bIns="0" rtlCol="0" anchor="ctr"/>
-          <a:lstStyle/>
-          <a:p>
-            <a:pPr indent="0" marL="0">
-              <a:buNone/>
-            </a:pPr>
-            <a:r>
-              <a:rPr lang="en-US" sz="1200" dirty="0">
-                <a:solidFill>
-                  <a:srgbClr val="111111"/>
-                </a:solidFill>
-                <a:latin typeface="Pretendard" pitchFamily="34" charset="0"/>
-                <a:ea typeface="Pretendard" pitchFamily="34" charset="-122"/>
-                <a:cs typeface="Pretendard" pitchFamily="34" charset="-120"/>
-              </a:rPr>
-              <a:t>'예뻐서'가 아니라 구성 · 서술 · 비주얼 중 하나를 고른다</a:t>
-            </a:r>
-            <a:endParaRPr lang="en-US" sz="1200" dirty="0"/>
-          </a:p>
-        </p:txBody>
-      </p:sp>
-      <p:sp>
-        <p:nvSpPr>
-          <p:cNvPr id="29" name="Shape 27"/>
-          <p:cNvSpPr/>
-          <p:nvPr/>
-        </p:nvSpPr>
-        <p:spPr>
-          <a:xfrm>
-            <a:off x="6297016" y="2487168"/>
-            <a:ext cx="5254600" cy="585216"/>
-          </a:xfrm>
-          <a:prstGeom prst="rect">
-            <a:avLst/>
-          </a:prstGeom>
-          <a:solidFill>
-            <a:srgbClr val="F2F2F2"/>
-          </a:solidFill>
-          <a:ln w="12700">
-            <a:solidFill>
-              <a:srgbClr val="F2F2F2"/>
-            </a:solidFill>
-            <a:prstDash val="solid"/>
-          </a:ln>
-        </p:spPr>
-      </p:sp>
-      <p:sp>
-        <p:nvSpPr>
-          <p:cNvPr id="30" name="Shape 28"/>
-          <p:cNvSpPr/>
-          <p:nvPr/>
-        </p:nvSpPr>
-        <p:spPr>
-          <a:xfrm>
-            <a:off x="6571336" y="2624328"/>
-            <a:ext cx="310896" cy="310896"/>
-          </a:xfrm>
-          <a:prstGeom prst="ellipse">
-            <a:avLst/>
-          </a:prstGeom>
-          <a:solidFill>
-            <a:srgbClr val="F2F2F2"/>
-          </a:solidFill>
-          <a:ln w="12700">
-            <a:solidFill>
-              <a:srgbClr val="111111"/>
-            </a:solidFill>
-            <a:prstDash val="solid"/>
-          </a:ln>
-        </p:spPr>
-      </p:sp>
-      <p:sp>
-        <p:nvSpPr>
-          <p:cNvPr id="31" name="Text 29"/>
-          <p:cNvSpPr/>
-          <p:nvPr/>
-        </p:nvSpPr>
-        <p:spPr>
-          <a:xfrm>
-            <a:off x="6571336" y="2624328"/>
-            <a:ext cx="310896" cy="310896"/>
-          </a:xfrm>
-          <a:prstGeom prst="rect">
-            <a:avLst/>
-          </a:prstGeom>
-          <a:noFill/>
-          <a:ln/>
-        </p:spPr>
-        <p:txBody>
-          <a:bodyPr wrap="square" lIns="0" tIns="0" rIns="0" bIns="0" rtlCol="0" anchor="ctr"/>
-          <a:lstStyle/>
-          <a:p>
-            <a:pPr algn="ctr" indent="0" marL="0">
-              <a:buNone/>
-            </a:pPr>
-            <a:r>
-              <a:rPr lang="en-US" sz="900" b="1" dirty="0">
-                <a:solidFill>
-                  <a:srgbClr val="111111"/>
-                </a:solidFill>
-                <a:latin typeface="Pretendard" pitchFamily="34" charset="0"/>
-                <a:ea typeface="Pretendard" pitchFamily="34" charset="-122"/>
-                <a:cs typeface="Pretendard" pitchFamily="34" charset="-120"/>
-              </a:rPr>
-              <a:t>06</a:t>
-            </a:r>
-            <a:endParaRPr lang="en-US" sz="900" dirty="0"/>
-          </a:p>
-        </p:txBody>
-      </p:sp>
-      <p:sp>
-        <p:nvSpPr>
-          <p:cNvPr id="32" name="Text 30"/>
-          <p:cNvSpPr/>
-          <p:nvPr/>
-        </p:nvSpPr>
-        <p:spPr>
-          <a:xfrm>
-            <a:off x="7010248" y="2487168"/>
-            <a:ext cx="4267048" cy="585216"/>
-          </a:xfrm>
-          <a:prstGeom prst="rect">
-            <a:avLst/>
-          </a:prstGeom>
-          <a:noFill/>
-          <a:ln/>
-        </p:spPr>
-        <p:txBody>
-          <a:bodyPr wrap="square" lIns="0" tIns="0" rIns="0" bIns="0" rtlCol="0" anchor="ctr"/>
-          <a:lstStyle/>
-          <a:p>
-            <a:pPr indent="0" marL="0">
-              <a:buNone/>
-            </a:pPr>
-            <a:r>
-              <a:rPr lang="en-US" sz="1200" dirty="0">
-                <a:solidFill>
-                  <a:srgbClr val="111111"/>
-                </a:solidFill>
-                <a:latin typeface="Pretendard" pitchFamily="34" charset="0"/>
-                <a:ea typeface="Pretendard" pitchFamily="34" charset="-122"/>
-                <a:cs typeface="Pretendard" pitchFamily="34" charset="-120"/>
-              </a:rPr>
-              <a:t>오늘 배운 세 기준으로 각각 점검한다</a:t>
-            </a:r>
-            <a:endParaRPr lang="en-US" sz="1200" dirty="0"/>
-          </a:p>
-        </p:txBody>
-      </p:sp>
-      <p:sp>
-        <p:nvSpPr>
-          <p:cNvPr id="33" name="Shape 31"/>
-          <p:cNvSpPr/>
-          <p:nvPr/>
-        </p:nvSpPr>
-        <p:spPr>
-          <a:xfrm>
-            <a:off x="6297016" y="3218688"/>
-            <a:ext cx="5254600" cy="585216"/>
-          </a:xfrm>
-          <a:prstGeom prst="rect">
-            <a:avLst/>
-          </a:prstGeom>
-          <a:solidFill>
-            <a:srgbClr val="F2F2F2"/>
-          </a:solidFill>
-          <a:ln w="12700">
-            <a:solidFill>
-              <a:srgbClr val="F2F2F2"/>
-            </a:solidFill>
-            <a:prstDash val="solid"/>
-          </a:ln>
-        </p:spPr>
-      </p:sp>
-      <p:sp>
-        <p:nvSpPr>
-          <p:cNvPr id="34" name="Shape 32"/>
-          <p:cNvSpPr/>
-          <p:nvPr/>
-        </p:nvSpPr>
-        <p:spPr>
-          <a:xfrm>
-            <a:off x="6571336" y="3355848"/>
-            <a:ext cx="310896" cy="310896"/>
-          </a:xfrm>
-          <a:prstGeom prst="ellipse">
-            <a:avLst/>
-          </a:prstGeom>
-          <a:solidFill>
-            <a:srgbClr val="F2F2F2"/>
-          </a:solidFill>
-          <a:ln w="12700">
-            <a:solidFill>
-              <a:srgbClr val="111111"/>
-            </a:solidFill>
-            <a:prstDash val="solid"/>
-          </a:ln>
-        </p:spPr>
-      </p:sp>
-      <p:sp>
-        <p:nvSpPr>
-          <p:cNvPr id="35" name="Text 33"/>
-          <p:cNvSpPr/>
-          <p:nvPr/>
-        </p:nvSpPr>
-        <p:spPr>
-          <a:xfrm>
-            <a:off x="6571336" y="3355848"/>
-            <a:ext cx="310896" cy="310896"/>
-          </a:xfrm>
-          <a:prstGeom prst="rect">
-            <a:avLst/>
-          </a:prstGeom>
-          <a:noFill/>
-          <a:ln/>
-        </p:spPr>
-        <p:txBody>
-          <a:bodyPr wrap="square" lIns="0" tIns="0" rIns="0" bIns="0" rtlCol="0" anchor="ctr"/>
-          <a:lstStyle/>
-          <a:p>
-            <a:pPr algn="ctr" indent="0" marL="0">
-              <a:buNone/>
-            </a:pPr>
-            <a:r>
-              <a:rPr lang="en-US" sz="900" b="1" dirty="0">
-                <a:solidFill>
-                  <a:srgbClr val="111111"/>
-                </a:solidFill>
-                <a:latin typeface="Pretendard" pitchFamily="34" charset="0"/>
-                <a:ea typeface="Pretendard" pitchFamily="34" charset="-122"/>
-                <a:cs typeface="Pretendard" pitchFamily="34" charset="-120"/>
-              </a:rPr>
-              <a:t>07</a:t>
-            </a:r>
-            <a:endParaRPr lang="en-US" sz="900" dirty="0"/>
-          </a:p>
-        </p:txBody>
-      </p:sp>
-      <p:sp>
-        <p:nvSpPr>
-          <p:cNvPr id="36" name="Text 34"/>
-          <p:cNvSpPr/>
-          <p:nvPr/>
-        </p:nvSpPr>
-        <p:spPr>
-          <a:xfrm>
-            <a:off x="7010248" y="3218688"/>
-            <a:ext cx="4267048" cy="585216"/>
-          </a:xfrm>
-          <a:prstGeom prst="rect">
-            <a:avLst/>
-          </a:prstGeom>
-          <a:noFill/>
-          <a:ln/>
-        </p:spPr>
-        <p:txBody>
-          <a:bodyPr wrap="square" lIns="0" tIns="0" rIns="0" bIns="0" rtlCol="0" anchor="ctr"/>
-          <a:lstStyle/>
-          <a:p>
-            <a:pPr indent="0" marL="0">
-              <a:buNone/>
-            </a:pPr>
-            <a:r>
-              <a:rPr lang="en-US" sz="1200" dirty="0">
-                <a:solidFill>
-                  <a:srgbClr val="111111"/>
-                </a:solidFill>
-                <a:latin typeface="Pretendard" pitchFamily="34" charset="0"/>
-                <a:ea typeface="Pretendard" pitchFamily="34" charset="-122"/>
-                <a:cs typeface="Pretendard" pitchFamily="34" charset="-120"/>
-              </a:rPr>
-              <a:t>가장 참고하고 싶은 하나를 고르고 이유를 적는다</a:t>
-            </a:r>
-            <a:endParaRPr lang="en-US" sz="1200" dirty="0"/>
-          </a:p>
-        </p:txBody>
-      </p:sp>
-      <p:sp>
-        <p:nvSpPr>
-          <p:cNvPr id="37" name="Shape 35"/>
-          <p:cNvSpPr/>
-          <p:nvPr/>
-        </p:nvSpPr>
-        <p:spPr>
-          <a:xfrm>
-            <a:off x="6297016" y="3950208"/>
-            <a:ext cx="5254600" cy="585216"/>
-          </a:xfrm>
-          <a:prstGeom prst="rect">
-            <a:avLst/>
-          </a:prstGeom>
-          <a:solidFill>
-            <a:srgbClr val="F2F2F2"/>
-          </a:solidFill>
-          <a:ln w="12700">
-            <a:solidFill>
-              <a:srgbClr val="F2F2F2"/>
-            </a:solidFill>
-            <a:prstDash val="solid"/>
-          </a:ln>
-        </p:spPr>
-      </p:sp>
-      <p:sp>
-        <p:nvSpPr>
-          <p:cNvPr id="38" name="Shape 36"/>
-          <p:cNvSpPr/>
-          <p:nvPr/>
-        </p:nvSpPr>
-        <p:spPr>
-          <a:xfrm>
-            <a:off x="6571336" y="4087368"/>
-            <a:ext cx="310896" cy="310896"/>
-          </a:xfrm>
-          <a:prstGeom prst="ellipse">
-            <a:avLst/>
-          </a:prstGeom>
-          <a:solidFill>
-            <a:srgbClr val="F2F2F2"/>
-          </a:solidFill>
-          <a:ln w="12700">
-            <a:solidFill>
-              <a:srgbClr val="111111"/>
-            </a:solidFill>
-            <a:prstDash val="solid"/>
-          </a:ln>
-        </p:spPr>
-      </p:sp>
-      <p:sp>
-        <p:nvSpPr>
-          <p:cNvPr id="39" name="Text 37"/>
-          <p:cNvSpPr/>
-          <p:nvPr/>
-        </p:nvSpPr>
-        <p:spPr>
-          <a:xfrm>
-            <a:off x="6571336" y="4087368"/>
-            <a:ext cx="310896" cy="310896"/>
-          </a:xfrm>
-          <a:prstGeom prst="rect">
-            <a:avLst/>
-          </a:prstGeom>
-          <a:noFill/>
-          <a:ln/>
-        </p:spPr>
-        <p:txBody>
-          <a:bodyPr wrap="square" lIns="0" tIns="0" rIns="0" bIns="0" rtlCol="0" anchor="ctr"/>
-          <a:lstStyle/>
-          <a:p>
-            <a:pPr algn="ctr" indent="0" marL="0">
-              <a:buNone/>
-            </a:pPr>
-            <a:r>
-              <a:rPr lang="en-US" sz="900" b="1" dirty="0">
-                <a:solidFill>
-                  <a:srgbClr val="111111"/>
-                </a:solidFill>
-                <a:latin typeface="Pretendard" pitchFamily="34" charset="0"/>
-                <a:ea typeface="Pretendard" pitchFamily="34" charset="-122"/>
-                <a:cs typeface="Pretendard" pitchFamily="34" charset="-120"/>
-              </a:rPr>
-              <a:t>08</a:t>
-            </a:r>
-            <a:endParaRPr lang="en-US" sz="900" dirty="0"/>
-          </a:p>
-        </p:txBody>
-      </p:sp>
-      <p:sp>
-        <p:nvSpPr>
-          <p:cNvPr id="40" name="Text 38"/>
-          <p:cNvSpPr/>
-          <p:nvPr/>
-        </p:nvSpPr>
-        <p:spPr>
-          <a:xfrm>
-            <a:off x="7010248" y="3950208"/>
-            <a:ext cx="4267048" cy="585216"/>
-          </a:xfrm>
-          <a:prstGeom prst="rect">
-            <a:avLst/>
-          </a:prstGeom>
-          <a:noFill/>
-          <a:ln/>
-        </p:spPr>
-        <p:txBody>
-          <a:bodyPr wrap="square" lIns="0" tIns="0" rIns="0" bIns="0" rtlCol="0" anchor="ctr"/>
-          <a:lstStyle/>
-          <a:p>
-            <a:pPr indent="0" marL="0">
-              <a:buNone/>
-            </a:pPr>
-            <a:r>
-              <a:rPr lang="en-US" sz="1200" dirty="0">
-                <a:solidFill>
-                  <a:srgbClr val="111111"/>
-                </a:solidFill>
-                <a:latin typeface="Pretendard" pitchFamily="34" charset="0"/>
-                <a:ea typeface="Pretendard" pitchFamily="34" charset="-122"/>
-                <a:cs typeface="Pretendard" pitchFamily="34" charset="-120"/>
-              </a:rPr>
-              <a:t>파일명을 '학번_이름_1주차'로 한다</a:t>
-            </a:r>
-            <a:endParaRPr lang="en-US" sz="1200" dirty="0"/>
-          </a:p>
-        </p:txBody>
-      </p:sp>
-      <p:sp>
-        <p:nvSpPr>
-          <p:cNvPr id="41" name="Shape 39"/>
-          <p:cNvSpPr/>
-          <p:nvPr/>
-        </p:nvSpPr>
-        <p:spPr>
-          <a:xfrm>
-            <a:off x="640080" y="4736592"/>
-            <a:ext cx="10911535" cy="7315"/>
+            <a:off x="640080" y="4626864"/>
+            <a:ext cx="10911535" cy="822960"/>
           </a:xfrm>
           <a:prstGeom prst="rect">
             <a:avLst/>
@@ -9475,46 +8975,127 @@
       </p:sp>
       <p:sp>
         <p:nvSpPr>
-          <p:cNvPr id="42" name="Text 40"/>
-          <p:cNvSpPr/>
-          <p:nvPr/>
-        </p:nvSpPr>
-        <p:spPr>
-          <a:xfrm>
-            <a:off x="640080" y="4846320"/>
-            <a:ext cx="10911535" cy="402336"/>
-          </a:xfrm>
-          <a:prstGeom prst="rect">
-            <a:avLst/>
-          </a:prstGeom>
-          <a:noFill/>
-          <a:ln/>
-        </p:spPr>
-        <p:txBody>
-          <a:bodyPr wrap="square" lIns="0" tIns="0" rIns="0" bIns="0" rtlCol="0" anchor="ctr"/>
-          <a:lstStyle/>
-          <a:p>
-            <a:pPr indent="0" marL="0">
-              <a:buNone/>
-            </a:pPr>
-            <a:r>
-              <a:rPr lang="en-US" sz="1250" b="1" dirty="0">
-                <a:solidFill>
-                  <a:srgbClr val="111111"/>
-                </a:solidFill>
-                <a:latin typeface="Pretendard" pitchFamily="34" charset="0"/>
-                <a:ea typeface="Pretendard" pitchFamily="34" charset="-122"/>
-                <a:cs typeface="Pretendard" pitchFamily="34" charset="-120"/>
-              </a:rPr>
-              <a:t>3개 모두 비슷한 스타일로 고르면 비교가 되지 않습니다. 일부러 다르게 고르세요.</a:t>
-            </a:r>
-            <a:endParaRPr lang="en-US" sz="1250" dirty="0"/>
-          </a:p>
-        </p:txBody>
-      </p:sp>
-      <p:sp>
-        <p:nvSpPr>
-          <p:cNvPr id="43" name="Shape 41"/>
+          <p:cNvPr id="22" name="Text 20"/>
+          <p:cNvSpPr/>
+          <p:nvPr/>
+        </p:nvSpPr>
+        <p:spPr>
+          <a:xfrm>
+            <a:off x="1005840" y="4718304"/>
+            <a:ext cx="1188720" cy="640080"/>
+          </a:xfrm>
+          <a:prstGeom prst="rect">
+            <a:avLst/>
+          </a:prstGeom>
+          <a:noFill/>
+          <a:ln/>
+        </p:spPr>
+        <p:txBody>
+          <a:bodyPr wrap="square" lIns="0" tIns="0" rIns="0" bIns="0" rtlCol="0" anchor="ctr"/>
+          <a:lstStyle/>
+          <a:p>
+            <a:pPr indent="0" marL="0">
+              <a:buNone/>
+            </a:pPr>
+            <a:r>
+              <a:rPr lang="en-US" sz="2200" dirty="0">
+                <a:solidFill>
+                  <a:srgbClr val="FFFFFF"/>
+                </a:solidFill>
+                <a:latin typeface="Pretendard Light" pitchFamily="34" charset="0"/>
+                <a:ea typeface="Pretendard Light" pitchFamily="34" charset="-122"/>
+                <a:cs typeface="Pretendard Light" pitchFamily="34" charset="-120"/>
+              </a:rPr>
+              <a:t>2분</a:t>
+            </a:r>
+            <a:endParaRPr lang="en-US" sz="2200" dirty="0"/>
+          </a:p>
+        </p:txBody>
+      </p:sp>
+      <p:sp>
+        <p:nvSpPr>
+          <p:cNvPr id="23" name="Text 21"/>
+          <p:cNvSpPr/>
+          <p:nvPr/>
+        </p:nvSpPr>
+        <p:spPr>
+          <a:xfrm>
+            <a:off x="2286000" y="4718304"/>
+            <a:ext cx="3291840" cy="640080"/>
+          </a:xfrm>
+          <a:prstGeom prst="rect">
+            <a:avLst/>
+          </a:prstGeom>
+          <a:noFill/>
+          <a:ln/>
+        </p:spPr>
+        <p:txBody>
+          <a:bodyPr wrap="square" lIns="0" tIns="0" rIns="0" bIns="0" rtlCol="0" anchor="ctr"/>
+          <a:lstStyle/>
+          <a:p>
+            <a:pPr indent="0" marL="0">
+              <a:buNone/>
+            </a:pPr>
+            <a:r>
+              <a:rPr lang="en-US" sz="1450" dirty="0">
+                <a:solidFill>
+                  <a:srgbClr val="FFFFFF"/>
+                </a:solidFill>
+                <a:latin typeface="Pretendard Black" pitchFamily="34" charset="0"/>
+                <a:ea typeface="Pretendard Black" pitchFamily="34" charset="-122"/>
+                <a:cs typeface="Pretendard Black" pitchFamily="34" charset="-120"/>
+              </a:rPr>
+              <a:t>세 개 확정</a:t>
+            </a:r>
+            <a:endParaRPr lang="en-US" sz="1450" dirty="0"/>
+          </a:p>
+        </p:txBody>
+      </p:sp>
+      <p:sp>
+        <p:nvSpPr>
+          <p:cNvPr id="24" name="Text 22"/>
+          <p:cNvSpPr/>
+          <p:nvPr/>
+        </p:nvSpPr>
+        <p:spPr>
+          <a:xfrm>
+            <a:off x="5669280" y="4718304"/>
+            <a:ext cx="5516575" cy="640080"/>
+          </a:xfrm>
+          <a:prstGeom prst="rect">
+            <a:avLst/>
+          </a:prstGeom>
+          <a:noFill/>
+          <a:ln/>
+        </p:spPr>
+        <p:txBody>
+          <a:bodyPr wrap="square" lIns="0" tIns="0" rIns="0" bIns="0" rtlCol="0" anchor="ctr"/>
+          <a:lstStyle/>
+          <a:p>
+            <a:pPr indent="0" marL="0">
+              <a:lnSpc>
+                <a:spcPct val="124000"/>
+              </a:lnSpc>
+              <a:buNone/>
+            </a:pPr>
+            <a:r>
+              <a:rPr lang="en-US" sz="1150" dirty="0">
+                <a:solidFill>
+                  <a:srgbClr val="B8B8B8"/>
+                </a:solidFill>
+                <a:latin typeface="Pretendard" pitchFamily="34" charset="0"/>
+                <a:ea typeface="Pretendard" pitchFamily="34" charset="-122"/>
+                <a:cs typeface="Pretendard" pitchFamily="34" charset="-120"/>
+              </a:rPr>
+              <a:t>남은 것 중 셋을 고르고, 각각 무엇이 좋았는지 한 줄씩 적습니다. 이 세 줄이 과제의 절반입니다.</a:t>
+            </a:r>
+            <a:endParaRPr lang="en-US" sz="1150" dirty="0"/>
+          </a:p>
+        </p:txBody>
+      </p:sp>
+      <p:sp>
+        <p:nvSpPr>
+          <p:cNvPr id="25" name="Shape 23"/>
           <p:cNvSpPr/>
           <p:nvPr/>
         </p:nvSpPr>
@@ -9539,7 +9120,7 @@
       </p:sp>
       <p:sp>
         <p:nvSpPr>
-          <p:cNvPr id="44" name="Text 42"/>
+          <p:cNvPr id="26" name="Text 24"/>
           <p:cNvSpPr/>
           <p:nvPr/>
         </p:nvSpPr>
@@ -9578,7 +9159,7 @@
       </p:sp>
       <p:sp>
         <p:nvSpPr>
-          <p:cNvPr id="45" name="Text 43"/>
+          <p:cNvPr id="27" name="Text 25"/>
           <p:cNvSpPr/>
           <p:nvPr/>
         </p:nvSpPr>
@@ -9861,6 +9442,1488 @@
                 <a:ea typeface="Pretendard Black" pitchFamily="34" charset="-122"/>
                 <a:cs typeface="Pretendard Black" pitchFamily="34" charset="-120"/>
               </a:rPr>
+              <a:t>스크랩 과제, 이렇게 하세요</a:t>
+            </a:r>
+            <a:endParaRPr lang="en-US" sz="3000" dirty="0"/>
+          </a:p>
+        </p:txBody>
+      </p:sp>
+      <p:sp>
+        <p:nvSpPr>
+          <p:cNvPr id="8" name="Text 6"/>
+          <p:cNvSpPr/>
+          <p:nvPr/>
+        </p:nvSpPr>
+        <p:spPr>
+          <a:xfrm>
+            <a:off x="640080" y="1371600"/>
+            <a:ext cx="10911535" cy="219456"/>
+          </a:xfrm>
+          <a:prstGeom prst="rect">
+            <a:avLst/>
+          </a:prstGeom>
+          <a:noFill/>
+          <a:ln/>
+        </p:spPr>
+        <p:txBody>
+          <a:bodyPr wrap="square" lIns="0" tIns="0" rIns="0" bIns="0" rtlCol="0" anchor="ctr"/>
+          <a:lstStyle/>
+          <a:p>
+            <a:pPr indent="0" marL="0">
+              <a:buNone/>
+            </a:pPr>
+            <a:r>
+              <a:rPr lang="en-US" sz="1150" dirty="0">
+                <a:solidFill>
+                  <a:srgbClr val="6E6E6E"/>
+                </a:solidFill>
+                <a:latin typeface="Pretendard" pitchFamily="34" charset="0"/>
+                <a:ea typeface="Pretendard" pitchFamily="34" charset="-122"/>
+                <a:cs typeface="Pretendard" pitchFamily="34" charset="-120"/>
+              </a:rPr>
+              <a:t>다음 주 자기 분석의 재료가 됩니다. 대충 모으면 2주차가 헛돕니다.</a:t>
+            </a:r>
+            <a:endParaRPr lang="en-US" sz="1150" dirty="0"/>
+          </a:p>
+        </p:txBody>
+      </p:sp>
+      <p:sp>
+        <p:nvSpPr>
+          <p:cNvPr id="9" name="Shape 7"/>
+          <p:cNvSpPr/>
+          <p:nvPr/>
+        </p:nvSpPr>
+        <p:spPr>
+          <a:xfrm>
+            <a:off x="640080" y="1755648"/>
+            <a:ext cx="5254600" cy="585216"/>
+          </a:xfrm>
+          <a:prstGeom prst="rect">
+            <a:avLst/>
+          </a:prstGeom>
+          <a:solidFill>
+            <a:srgbClr val="F2F2F2"/>
+          </a:solidFill>
+          <a:ln w="12700">
+            <a:solidFill>
+              <a:srgbClr val="F2F2F2"/>
+            </a:solidFill>
+            <a:prstDash val="solid"/>
+          </a:ln>
+        </p:spPr>
+      </p:sp>
+      <p:sp>
+        <p:nvSpPr>
+          <p:cNvPr id="10" name="Shape 8"/>
+          <p:cNvSpPr/>
+          <p:nvPr/>
+        </p:nvSpPr>
+        <p:spPr>
+          <a:xfrm>
+            <a:off x="914400" y="1892808"/>
+            <a:ext cx="310896" cy="310896"/>
+          </a:xfrm>
+          <a:prstGeom prst="ellipse">
+            <a:avLst/>
+          </a:prstGeom>
+          <a:solidFill>
+            <a:srgbClr val="F2F2F2"/>
+          </a:solidFill>
+          <a:ln w="12700">
+            <a:solidFill>
+              <a:srgbClr val="111111"/>
+            </a:solidFill>
+            <a:prstDash val="solid"/>
+          </a:ln>
+        </p:spPr>
+      </p:sp>
+      <p:sp>
+        <p:nvSpPr>
+          <p:cNvPr id="11" name="Text 9"/>
+          <p:cNvSpPr/>
+          <p:nvPr/>
+        </p:nvSpPr>
+        <p:spPr>
+          <a:xfrm>
+            <a:off x="914400" y="1892808"/>
+            <a:ext cx="310896" cy="310896"/>
+          </a:xfrm>
+          <a:prstGeom prst="rect">
+            <a:avLst/>
+          </a:prstGeom>
+          <a:noFill/>
+          <a:ln/>
+        </p:spPr>
+        <p:txBody>
+          <a:bodyPr wrap="square" lIns="0" tIns="0" rIns="0" bIns="0" rtlCol="0" anchor="ctr"/>
+          <a:lstStyle/>
+          <a:p>
+            <a:pPr algn="ctr" indent="0" marL="0">
+              <a:buNone/>
+            </a:pPr>
+            <a:r>
+              <a:rPr lang="en-US" sz="900" b="1" dirty="0">
+                <a:solidFill>
+                  <a:srgbClr val="111111"/>
+                </a:solidFill>
+                <a:latin typeface="Pretendard" pitchFamily="34" charset="0"/>
+                <a:ea typeface="Pretendard" pitchFamily="34" charset="-122"/>
+                <a:cs typeface="Pretendard" pitchFamily="34" charset="-120"/>
+              </a:rPr>
+              <a:t>01</a:t>
+            </a:r>
+            <a:endParaRPr lang="en-US" sz="900" dirty="0"/>
+          </a:p>
+        </p:txBody>
+      </p:sp>
+      <p:sp>
+        <p:nvSpPr>
+          <p:cNvPr id="12" name="Text 10"/>
+          <p:cNvSpPr/>
+          <p:nvPr/>
+        </p:nvSpPr>
+        <p:spPr>
+          <a:xfrm>
+            <a:off x="1353312" y="1755648"/>
+            <a:ext cx="4267048" cy="585216"/>
+          </a:xfrm>
+          <a:prstGeom prst="rect">
+            <a:avLst/>
+          </a:prstGeom>
+          <a:noFill/>
+          <a:ln/>
+        </p:spPr>
+        <p:txBody>
+          <a:bodyPr wrap="square" lIns="0" tIns="0" rIns="0" bIns="0" rtlCol="0" anchor="ctr"/>
+          <a:lstStyle/>
+          <a:p>
+            <a:pPr indent="0" marL="0">
+              <a:buNone/>
+            </a:pPr>
+            <a:r>
+              <a:rPr lang="en-US" sz="1200" dirty="0">
+                <a:solidFill>
+                  <a:srgbClr val="111111"/>
+                </a:solidFill>
+                <a:latin typeface="Pretendard" pitchFamily="34" charset="0"/>
+                <a:ea typeface="Pretendard" pitchFamily="34" charset="-122"/>
+                <a:cs typeface="Pretendard" pitchFamily="34" charset="-120"/>
+              </a:rPr>
+              <a:t>관심 분야의 포트폴리오 3개를 고른다</a:t>
+            </a:r>
+            <a:endParaRPr lang="en-US" sz="1200" dirty="0"/>
+          </a:p>
+        </p:txBody>
+      </p:sp>
+      <p:sp>
+        <p:nvSpPr>
+          <p:cNvPr id="13" name="Shape 11"/>
+          <p:cNvSpPr/>
+          <p:nvPr/>
+        </p:nvSpPr>
+        <p:spPr>
+          <a:xfrm>
+            <a:off x="640080" y="2487168"/>
+            <a:ext cx="5254600" cy="585216"/>
+          </a:xfrm>
+          <a:prstGeom prst="rect">
+            <a:avLst/>
+          </a:prstGeom>
+          <a:solidFill>
+            <a:srgbClr val="F2F2F2"/>
+          </a:solidFill>
+          <a:ln w="12700">
+            <a:solidFill>
+              <a:srgbClr val="F2F2F2"/>
+            </a:solidFill>
+            <a:prstDash val="solid"/>
+          </a:ln>
+        </p:spPr>
+      </p:sp>
+      <p:sp>
+        <p:nvSpPr>
+          <p:cNvPr id="14" name="Shape 12"/>
+          <p:cNvSpPr/>
+          <p:nvPr/>
+        </p:nvSpPr>
+        <p:spPr>
+          <a:xfrm>
+            <a:off x="914400" y="2624328"/>
+            <a:ext cx="310896" cy="310896"/>
+          </a:xfrm>
+          <a:prstGeom prst="ellipse">
+            <a:avLst/>
+          </a:prstGeom>
+          <a:solidFill>
+            <a:srgbClr val="F2F2F2"/>
+          </a:solidFill>
+          <a:ln w="12700">
+            <a:solidFill>
+              <a:srgbClr val="111111"/>
+            </a:solidFill>
+            <a:prstDash val="solid"/>
+          </a:ln>
+        </p:spPr>
+      </p:sp>
+      <p:sp>
+        <p:nvSpPr>
+          <p:cNvPr id="15" name="Text 13"/>
+          <p:cNvSpPr/>
+          <p:nvPr/>
+        </p:nvSpPr>
+        <p:spPr>
+          <a:xfrm>
+            <a:off x="914400" y="2624328"/>
+            <a:ext cx="310896" cy="310896"/>
+          </a:xfrm>
+          <a:prstGeom prst="rect">
+            <a:avLst/>
+          </a:prstGeom>
+          <a:noFill/>
+          <a:ln/>
+        </p:spPr>
+        <p:txBody>
+          <a:bodyPr wrap="square" lIns="0" tIns="0" rIns="0" bIns="0" rtlCol="0" anchor="ctr"/>
+          <a:lstStyle/>
+          <a:p>
+            <a:pPr algn="ctr" indent="0" marL="0">
+              <a:buNone/>
+            </a:pPr>
+            <a:r>
+              <a:rPr lang="en-US" sz="900" b="1" dirty="0">
+                <a:solidFill>
+                  <a:srgbClr val="111111"/>
+                </a:solidFill>
+                <a:latin typeface="Pretendard" pitchFamily="34" charset="0"/>
+                <a:ea typeface="Pretendard" pitchFamily="34" charset="-122"/>
+                <a:cs typeface="Pretendard" pitchFamily="34" charset="-120"/>
+              </a:rPr>
+              <a:t>02</a:t>
+            </a:r>
+            <a:endParaRPr lang="en-US" sz="900" dirty="0"/>
+          </a:p>
+        </p:txBody>
+      </p:sp>
+      <p:sp>
+        <p:nvSpPr>
+          <p:cNvPr id="16" name="Text 14"/>
+          <p:cNvSpPr/>
+          <p:nvPr/>
+        </p:nvSpPr>
+        <p:spPr>
+          <a:xfrm>
+            <a:off x="1353312" y="2487168"/>
+            <a:ext cx="4267048" cy="585216"/>
+          </a:xfrm>
+          <a:prstGeom prst="rect">
+            <a:avLst/>
+          </a:prstGeom>
+          <a:noFill/>
+          <a:ln/>
+        </p:spPr>
+        <p:txBody>
+          <a:bodyPr wrap="square" lIns="0" tIns="0" rIns="0" bIns="0" rtlCol="0" anchor="ctr"/>
+          <a:lstStyle/>
+          <a:p>
+            <a:pPr indent="0" marL="0">
+              <a:buNone/>
+            </a:pPr>
+            <a:r>
+              <a:rPr lang="en-US" sz="1200" dirty="0">
+                <a:solidFill>
+                  <a:srgbClr val="111111"/>
+                </a:solidFill>
+                <a:latin typeface="Pretendard" pitchFamily="34" charset="0"/>
+                <a:ea typeface="Pretendard" pitchFamily="34" charset="-122"/>
+                <a:cs typeface="Pretendard" pitchFamily="34" charset="-120"/>
+              </a:rPr>
+              <a:t>셋을 서로 다른 유형으로 고른다 (웹형 · PDF형 · 인쇄형 등)</a:t>
+            </a:r>
+            <a:endParaRPr lang="en-US" sz="1200" dirty="0"/>
+          </a:p>
+        </p:txBody>
+      </p:sp>
+      <p:sp>
+        <p:nvSpPr>
+          <p:cNvPr id="17" name="Shape 15"/>
+          <p:cNvSpPr/>
+          <p:nvPr/>
+        </p:nvSpPr>
+        <p:spPr>
+          <a:xfrm>
+            <a:off x="640080" y="3218688"/>
+            <a:ext cx="5254600" cy="585216"/>
+          </a:xfrm>
+          <a:prstGeom prst="rect">
+            <a:avLst/>
+          </a:prstGeom>
+          <a:solidFill>
+            <a:srgbClr val="F2F2F2"/>
+          </a:solidFill>
+          <a:ln w="12700">
+            <a:solidFill>
+              <a:srgbClr val="F2F2F2"/>
+            </a:solidFill>
+            <a:prstDash val="solid"/>
+          </a:ln>
+        </p:spPr>
+      </p:sp>
+      <p:sp>
+        <p:nvSpPr>
+          <p:cNvPr id="18" name="Shape 16"/>
+          <p:cNvSpPr/>
+          <p:nvPr/>
+        </p:nvSpPr>
+        <p:spPr>
+          <a:xfrm>
+            <a:off x="914400" y="3355848"/>
+            <a:ext cx="310896" cy="310896"/>
+          </a:xfrm>
+          <a:prstGeom prst="ellipse">
+            <a:avLst/>
+          </a:prstGeom>
+          <a:solidFill>
+            <a:srgbClr val="F2F2F2"/>
+          </a:solidFill>
+          <a:ln w="12700">
+            <a:solidFill>
+              <a:srgbClr val="111111"/>
+            </a:solidFill>
+            <a:prstDash val="solid"/>
+          </a:ln>
+        </p:spPr>
+      </p:sp>
+      <p:sp>
+        <p:nvSpPr>
+          <p:cNvPr id="19" name="Text 17"/>
+          <p:cNvSpPr/>
+          <p:nvPr/>
+        </p:nvSpPr>
+        <p:spPr>
+          <a:xfrm>
+            <a:off x="914400" y="3355848"/>
+            <a:ext cx="310896" cy="310896"/>
+          </a:xfrm>
+          <a:prstGeom prst="rect">
+            <a:avLst/>
+          </a:prstGeom>
+          <a:noFill/>
+          <a:ln/>
+        </p:spPr>
+        <p:txBody>
+          <a:bodyPr wrap="square" lIns="0" tIns="0" rIns="0" bIns="0" rtlCol="0" anchor="ctr"/>
+          <a:lstStyle/>
+          <a:p>
+            <a:pPr algn="ctr" indent="0" marL="0">
+              <a:buNone/>
+            </a:pPr>
+            <a:r>
+              <a:rPr lang="en-US" sz="900" b="1" dirty="0">
+                <a:solidFill>
+                  <a:srgbClr val="111111"/>
+                </a:solidFill>
+                <a:latin typeface="Pretendard" pitchFamily="34" charset="0"/>
+                <a:ea typeface="Pretendard" pitchFamily="34" charset="-122"/>
+                <a:cs typeface="Pretendard" pitchFamily="34" charset="-120"/>
+              </a:rPr>
+              <a:t>03</a:t>
+            </a:r>
+            <a:endParaRPr lang="en-US" sz="900" dirty="0"/>
+          </a:p>
+        </p:txBody>
+      </p:sp>
+      <p:sp>
+        <p:nvSpPr>
+          <p:cNvPr id="20" name="Text 18"/>
+          <p:cNvSpPr/>
+          <p:nvPr/>
+        </p:nvSpPr>
+        <p:spPr>
+          <a:xfrm>
+            <a:off x="1353312" y="3218688"/>
+            <a:ext cx="4267048" cy="585216"/>
+          </a:xfrm>
+          <a:prstGeom prst="rect">
+            <a:avLst/>
+          </a:prstGeom>
+          <a:noFill/>
+          <a:ln/>
+        </p:spPr>
+        <p:txBody>
+          <a:bodyPr wrap="square" lIns="0" tIns="0" rIns="0" bIns="0" rtlCol="0" anchor="ctr"/>
+          <a:lstStyle/>
+          <a:p>
+            <a:pPr indent="0" marL="0">
+              <a:buNone/>
+            </a:pPr>
+            <a:r>
+              <a:rPr lang="en-US" sz="1200" dirty="0">
+                <a:solidFill>
+                  <a:srgbClr val="111111"/>
+                </a:solidFill>
+                <a:latin typeface="Pretendard" pitchFamily="34" charset="0"/>
+                <a:ea typeface="Pretendard" pitchFamily="34" charset="-122"/>
+                <a:cs typeface="Pretendard" pitchFamily="34" charset="-120"/>
+              </a:rPr>
+              <a:t>각각 링크와 첫 화면 캡처를 남긴다</a:t>
+            </a:r>
+            <a:endParaRPr lang="en-US" sz="1200" dirty="0"/>
+          </a:p>
+        </p:txBody>
+      </p:sp>
+      <p:sp>
+        <p:nvSpPr>
+          <p:cNvPr id="21" name="Shape 19"/>
+          <p:cNvSpPr/>
+          <p:nvPr/>
+        </p:nvSpPr>
+        <p:spPr>
+          <a:xfrm>
+            <a:off x="640080" y="3950208"/>
+            <a:ext cx="5254600" cy="585216"/>
+          </a:xfrm>
+          <a:prstGeom prst="rect">
+            <a:avLst/>
+          </a:prstGeom>
+          <a:solidFill>
+            <a:srgbClr val="F2F2F2"/>
+          </a:solidFill>
+          <a:ln w="12700">
+            <a:solidFill>
+              <a:srgbClr val="F2F2F2"/>
+            </a:solidFill>
+            <a:prstDash val="solid"/>
+          </a:ln>
+        </p:spPr>
+      </p:sp>
+      <p:sp>
+        <p:nvSpPr>
+          <p:cNvPr id="22" name="Shape 20"/>
+          <p:cNvSpPr/>
+          <p:nvPr/>
+        </p:nvSpPr>
+        <p:spPr>
+          <a:xfrm>
+            <a:off x="914400" y="4087368"/>
+            <a:ext cx="310896" cy="310896"/>
+          </a:xfrm>
+          <a:prstGeom prst="ellipse">
+            <a:avLst/>
+          </a:prstGeom>
+          <a:solidFill>
+            <a:srgbClr val="F2F2F2"/>
+          </a:solidFill>
+          <a:ln w="12700">
+            <a:solidFill>
+              <a:srgbClr val="111111"/>
+            </a:solidFill>
+            <a:prstDash val="solid"/>
+          </a:ln>
+        </p:spPr>
+      </p:sp>
+      <p:sp>
+        <p:nvSpPr>
+          <p:cNvPr id="23" name="Text 21"/>
+          <p:cNvSpPr/>
+          <p:nvPr/>
+        </p:nvSpPr>
+        <p:spPr>
+          <a:xfrm>
+            <a:off x="914400" y="4087368"/>
+            <a:ext cx="310896" cy="310896"/>
+          </a:xfrm>
+          <a:prstGeom prst="rect">
+            <a:avLst/>
+          </a:prstGeom>
+          <a:noFill/>
+          <a:ln/>
+        </p:spPr>
+        <p:txBody>
+          <a:bodyPr wrap="square" lIns="0" tIns="0" rIns="0" bIns="0" rtlCol="0" anchor="ctr"/>
+          <a:lstStyle/>
+          <a:p>
+            <a:pPr algn="ctr" indent="0" marL="0">
+              <a:buNone/>
+            </a:pPr>
+            <a:r>
+              <a:rPr lang="en-US" sz="900" b="1" dirty="0">
+                <a:solidFill>
+                  <a:srgbClr val="111111"/>
+                </a:solidFill>
+                <a:latin typeface="Pretendard" pitchFamily="34" charset="0"/>
+                <a:ea typeface="Pretendard" pitchFamily="34" charset="-122"/>
+                <a:cs typeface="Pretendard" pitchFamily="34" charset="-120"/>
+              </a:rPr>
+              <a:t>04</a:t>
+            </a:r>
+            <a:endParaRPr lang="en-US" sz="900" dirty="0"/>
+          </a:p>
+        </p:txBody>
+      </p:sp>
+      <p:sp>
+        <p:nvSpPr>
+          <p:cNvPr id="24" name="Text 22"/>
+          <p:cNvSpPr/>
+          <p:nvPr/>
+        </p:nvSpPr>
+        <p:spPr>
+          <a:xfrm>
+            <a:off x="1353312" y="3950208"/>
+            <a:ext cx="4267048" cy="585216"/>
+          </a:xfrm>
+          <a:prstGeom prst="rect">
+            <a:avLst/>
+          </a:prstGeom>
+          <a:noFill/>
+          <a:ln/>
+        </p:spPr>
+        <p:txBody>
+          <a:bodyPr wrap="square" lIns="0" tIns="0" rIns="0" bIns="0" rtlCol="0" anchor="ctr"/>
+          <a:lstStyle/>
+          <a:p>
+            <a:pPr indent="0" marL="0">
+              <a:buNone/>
+            </a:pPr>
+            <a:r>
+              <a:rPr lang="en-US" sz="1200" dirty="0">
+                <a:solidFill>
+                  <a:srgbClr val="111111"/>
+                </a:solidFill>
+                <a:latin typeface="Pretendard" pitchFamily="34" charset="0"/>
+                <a:ea typeface="Pretendard" pitchFamily="34" charset="-122"/>
+                <a:cs typeface="Pretendard" pitchFamily="34" charset="-120"/>
+              </a:rPr>
+              <a:t>무엇이 좋았는지 한 줄씩 적는다</a:t>
+            </a:r>
+            <a:endParaRPr lang="en-US" sz="1200" dirty="0"/>
+          </a:p>
+        </p:txBody>
+      </p:sp>
+      <p:sp>
+        <p:nvSpPr>
+          <p:cNvPr id="25" name="Shape 23"/>
+          <p:cNvSpPr/>
+          <p:nvPr/>
+        </p:nvSpPr>
+        <p:spPr>
+          <a:xfrm>
+            <a:off x="6297016" y="1755648"/>
+            <a:ext cx="5254600" cy="585216"/>
+          </a:xfrm>
+          <a:prstGeom prst="rect">
+            <a:avLst/>
+          </a:prstGeom>
+          <a:solidFill>
+            <a:srgbClr val="F2F2F2"/>
+          </a:solidFill>
+          <a:ln w="12700">
+            <a:solidFill>
+              <a:srgbClr val="F2F2F2"/>
+            </a:solidFill>
+            <a:prstDash val="solid"/>
+          </a:ln>
+        </p:spPr>
+      </p:sp>
+      <p:sp>
+        <p:nvSpPr>
+          <p:cNvPr id="26" name="Shape 24"/>
+          <p:cNvSpPr/>
+          <p:nvPr/>
+        </p:nvSpPr>
+        <p:spPr>
+          <a:xfrm>
+            <a:off x="6571336" y="1892808"/>
+            <a:ext cx="310896" cy="310896"/>
+          </a:xfrm>
+          <a:prstGeom prst="ellipse">
+            <a:avLst/>
+          </a:prstGeom>
+          <a:solidFill>
+            <a:srgbClr val="F2F2F2"/>
+          </a:solidFill>
+          <a:ln w="12700">
+            <a:solidFill>
+              <a:srgbClr val="111111"/>
+            </a:solidFill>
+            <a:prstDash val="solid"/>
+          </a:ln>
+        </p:spPr>
+      </p:sp>
+      <p:sp>
+        <p:nvSpPr>
+          <p:cNvPr id="27" name="Text 25"/>
+          <p:cNvSpPr/>
+          <p:nvPr/>
+        </p:nvSpPr>
+        <p:spPr>
+          <a:xfrm>
+            <a:off x="6571336" y="1892808"/>
+            <a:ext cx="310896" cy="310896"/>
+          </a:xfrm>
+          <a:prstGeom prst="rect">
+            <a:avLst/>
+          </a:prstGeom>
+          <a:noFill/>
+          <a:ln/>
+        </p:spPr>
+        <p:txBody>
+          <a:bodyPr wrap="square" lIns="0" tIns="0" rIns="0" bIns="0" rtlCol="0" anchor="ctr"/>
+          <a:lstStyle/>
+          <a:p>
+            <a:pPr algn="ctr" indent="0" marL="0">
+              <a:buNone/>
+            </a:pPr>
+            <a:r>
+              <a:rPr lang="en-US" sz="900" b="1" dirty="0">
+                <a:solidFill>
+                  <a:srgbClr val="111111"/>
+                </a:solidFill>
+                <a:latin typeface="Pretendard" pitchFamily="34" charset="0"/>
+                <a:ea typeface="Pretendard" pitchFamily="34" charset="-122"/>
+                <a:cs typeface="Pretendard" pitchFamily="34" charset="-120"/>
+              </a:rPr>
+              <a:t>05</a:t>
+            </a:r>
+            <a:endParaRPr lang="en-US" sz="900" dirty="0"/>
+          </a:p>
+        </p:txBody>
+      </p:sp>
+      <p:sp>
+        <p:nvSpPr>
+          <p:cNvPr id="28" name="Text 26"/>
+          <p:cNvSpPr/>
+          <p:nvPr/>
+        </p:nvSpPr>
+        <p:spPr>
+          <a:xfrm>
+            <a:off x="7010248" y="1755648"/>
+            <a:ext cx="4267048" cy="585216"/>
+          </a:xfrm>
+          <a:prstGeom prst="rect">
+            <a:avLst/>
+          </a:prstGeom>
+          <a:noFill/>
+          <a:ln/>
+        </p:spPr>
+        <p:txBody>
+          <a:bodyPr wrap="square" lIns="0" tIns="0" rIns="0" bIns="0" rtlCol="0" anchor="ctr"/>
+          <a:lstStyle/>
+          <a:p>
+            <a:pPr indent="0" marL="0">
+              <a:buNone/>
+            </a:pPr>
+            <a:r>
+              <a:rPr lang="en-US" sz="1200" dirty="0">
+                <a:solidFill>
+                  <a:srgbClr val="111111"/>
+                </a:solidFill>
+                <a:latin typeface="Pretendard" pitchFamily="34" charset="0"/>
+                <a:ea typeface="Pretendard" pitchFamily="34" charset="-122"/>
+                <a:cs typeface="Pretendard" pitchFamily="34" charset="-120"/>
+              </a:rPr>
+              <a:t>'예뻐서'가 아니라 구성 · 서술 · 비주얼 중 하나를 고른다</a:t>
+            </a:r>
+            <a:endParaRPr lang="en-US" sz="1200" dirty="0"/>
+          </a:p>
+        </p:txBody>
+      </p:sp>
+      <p:sp>
+        <p:nvSpPr>
+          <p:cNvPr id="29" name="Shape 27"/>
+          <p:cNvSpPr/>
+          <p:nvPr/>
+        </p:nvSpPr>
+        <p:spPr>
+          <a:xfrm>
+            <a:off x="6297016" y="2487168"/>
+            <a:ext cx="5254600" cy="585216"/>
+          </a:xfrm>
+          <a:prstGeom prst="rect">
+            <a:avLst/>
+          </a:prstGeom>
+          <a:solidFill>
+            <a:srgbClr val="F2F2F2"/>
+          </a:solidFill>
+          <a:ln w="12700">
+            <a:solidFill>
+              <a:srgbClr val="F2F2F2"/>
+            </a:solidFill>
+            <a:prstDash val="solid"/>
+          </a:ln>
+        </p:spPr>
+      </p:sp>
+      <p:sp>
+        <p:nvSpPr>
+          <p:cNvPr id="30" name="Shape 28"/>
+          <p:cNvSpPr/>
+          <p:nvPr/>
+        </p:nvSpPr>
+        <p:spPr>
+          <a:xfrm>
+            <a:off x="6571336" y="2624328"/>
+            <a:ext cx="310896" cy="310896"/>
+          </a:xfrm>
+          <a:prstGeom prst="ellipse">
+            <a:avLst/>
+          </a:prstGeom>
+          <a:solidFill>
+            <a:srgbClr val="F2F2F2"/>
+          </a:solidFill>
+          <a:ln w="12700">
+            <a:solidFill>
+              <a:srgbClr val="111111"/>
+            </a:solidFill>
+            <a:prstDash val="solid"/>
+          </a:ln>
+        </p:spPr>
+      </p:sp>
+      <p:sp>
+        <p:nvSpPr>
+          <p:cNvPr id="31" name="Text 29"/>
+          <p:cNvSpPr/>
+          <p:nvPr/>
+        </p:nvSpPr>
+        <p:spPr>
+          <a:xfrm>
+            <a:off x="6571336" y="2624328"/>
+            <a:ext cx="310896" cy="310896"/>
+          </a:xfrm>
+          <a:prstGeom prst="rect">
+            <a:avLst/>
+          </a:prstGeom>
+          <a:noFill/>
+          <a:ln/>
+        </p:spPr>
+        <p:txBody>
+          <a:bodyPr wrap="square" lIns="0" tIns="0" rIns="0" bIns="0" rtlCol="0" anchor="ctr"/>
+          <a:lstStyle/>
+          <a:p>
+            <a:pPr algn="ctr" indent="0" marL="0">
+              <a:buNone/>
+            </a:pPr>
+            <a:r>
+              <a:rPr lang="en-US" sz="900" b="1" dirty="0">
+                <a:solidFill>
+                  <a:srgbClr val="111111"/>
+                </a:solidFill>
+                <a:latin typeface="Pretendard" pitchFamily="34" charset="0"/>
+                <a:ea typeface="Pretendard" pitchFamily="34" charset="-122"/>
+                <a:cs typeface="Pretendard" pitchFamily="34" charset="-120"/>
+              </a:rPr>
+              <a:t>06</a:t>
+            </a:r>
+            <a:endParaRPr lang="en-US" sz="900" dirty="0"/>
+          </a:p>
+        </p:txBody>
+      </p:sp>
+      <p:sp>
+        <p:nvSpPr>
+          <p:cNvPr id="32" name="Text 30"/>
+          <p:cNvSpPr/>
+          <p:nvPr/>
+        </p:nvSpPr>
+        <p:spPr>
+          <a:xfrm>
+            <a:off x="7010248" y="2487168"/>
+            <a:ext cx="4267048" cy="585216"/>
+          </a:xfrm>
+          <a:prstGeom prst="rect">
+            <a:avLst/>
+          </a:prstGeom>
+          <a:noFill/>
+          <a:ln/>
+        </p:spPr>
+        <p:txBody>
+          <a:bodyPr wrap="square" lIns="0" tIns="0" rIns="0" bIns="0" rtlCol="0" anchor="ctr"/>
+          <a:lstStyle/>
+          <a:p>
+            <a:pPr indent="0" marL="0">
+              <a:buNone/>
+            </a:pPr>
+            <a:r>
+              <a:rPr lang="en-US" sz="1200" dirty="0">
+                <a:solidFill>
+                  <a:srgbClr val="111111"/>
+                </a:solidFill>
+                <a:latin typeface="Pretendard" pitchFamily="34" charset="0"/>
+                <a:ea typeface="Pretendard" pitchFamily="34" charset="-122"/>
+                <a:cs typeface="Pretendard" pitchFamily="34" charset="-120"/>
+              </a:rPr>
+              <a:t>오늘 배운 세 기준으로 각각 점검한다</a:t>
+            </a:r>
+            <a:endParaRPr lang="en-US" sz="1200" dirty="0"/>
+          </a:p>
+        </p:txBody>
+      </p:sp>
+      <p:sp>
+        <p:nvSpPr>
+          <p:cNvPr id="33" name="Shape 31"/>
+          <p:cNvSpPr/>
+          <p:nvPr/>
+        </p:nvSpPr>
+        <p:spPr>
+          <a:xfrm>
+            <a:off x="6297016" y="3218688"/>
+            <a:ext cx="5254600" cy="585216"/>
+          </a:xfrm>
+          <a:prstGeom prst="rect">
+            <a:avLst/>
+          </a:prstGeom>
+          <a:solidFill>
+            <a:srgbClr val="F2F2F2"/>
+          </a:solidFill>
+          <a:ln w="12700">
+            <a:solidFill>
+              <a:srgbClr val="F2F2F2"/>
+            </a:solidFill>
+            <a:prstDash val="solid"/>
+          </a:ln>
+        </p:spPr>
+      </p:sp>
+      <p:sp>
+        <p:nvSpPr>
+          <p:cNvPr id="34" name="Shape 32"/>
+          <p:cNvSpPr/>
+          <p:nvPr/>
+        </p:nvSpPr>
+        <p:spPr>
+          <a:xfrm>
+            <a:off x="6571336" y="3355848"/>
+            <a:ext cx="310896" cy="310896"/>
+          </a:xfrm>
+          <a:prstGeom prst="ellipse">
+            <a:avLst/>
+          </a:prstGeom>
+          <a:solidFill>
+            <a:srgbClr val="F2F2F2"/>
+          </a:solidFill>
+          <a:ln w="12700">
+            <a:solidFill>
+              <a:srgbClr val="111111"/>
+            </a:solidFill>
+            <a:prstDash val="solid"/>
+          </a:ln>
+        </p:spPr>
+      </p:sp>
+      <p:sp>
+        <p:nvSpPr>
+          <p:cNvPr id="35" name="Text 33"/>
+          <p:cNvSpPr/>
+          <p:nvPr/>
+        </p:nvSpPr>
+        <p:spPr>
+          <a:xfrm>
+            <a:off x="6571336" y="3355848"/>
+            <a:ext cx="310896" cy="310896"/>
+          </a:xfrm>
+          <a:prstGeom prst="rect">
+            <a:avLst/>
+          </a:prstGeom>
+          <a:noFill/>
+          <a:ln/>
+        </p:spPr>
+        <p:txBody>
+          <a:bodyPr wrap="square" lIns="0" tIns="0" rIns="0" bIns="0" rtlCol="0" anchor="ctr"/>
+          <a:lstStyle/>
+          <a:p>
+            <a:pPr algn="ctr" indent="0" marL="0">
+              <a:buNone/>
+            </a:pPr>
+            <a:r>
+              <a:rPr lang="en-US" sz="900" b="1" dirty="0">
+                <a:solidFill>
+                  <a:srgbClr val="111111"/>
+                </a:solidFill>
+                <a:latin typeface="Pretendard" pitchFamily="34" charset="0"/>
+                <a:ea typeface="Pretendard" pitchFamily="34" charset="-122"/>
+                <a:cs typeface="Pretendard" pitchFamily="34" charset="-120"/>
+              </a:rPr>
+              <a:t>07</a:t>
+            </a:r>
+            <a:endParaRPr lang="en-US" sz="900" dirty="0"/>
+          </a:p>
+        </p:txBody>
+      </p:sp>
+      <p:sp>
+        <p:nvSpPr>
+          <p:cNvPr id="36" name="Text 34"/>
+          <p:cNvSpPr/>
+          <p:nvPr/>
+        </p:nvSpPr>
+        <p:spPr>
+          <a:xfrm>
+            <a:off x="7010248" y="3218688"/>
+            <a:ext cx="4267048" cy="585216"/>
+          </a:xfrm>
+          <a:prstGeom prst="rect">
+            <a:avLst/>
+          </a:prstGeom>
+          <a:noFill/>
+          <a:ln/>
+        </p:spPr>
+        <p:txBody>
+          <a:bodyPr wrap="square" lIns="0" tIns="0" rIns="0" bIns="0" rtlCol="0" anchor="ctr"/>
+          <a:lstStyle/>
+          <a:p>
+            <a:pPr indent="0" marL="0">
+              <a:buNone/>
+            </a:pPr>
+            <a:r>
+              <a:rPr lang="en-US" sz="1200" dirty="0">
+                <a:solidFill>
+                  <a:srgbClr val="111111"/>
+                </a:solidFill>
+                <a:latin typeface="Pretendard" pitchFamily="34" charset="0"/>
+                <a:ea typeface="Pretendard" pitchFamily="34" charset="-122"/>
+                <a:cs typeface="Pretendard" pitchFamily="34" charset="-120"/>
+              </a:rPr>
+              <a:t>가장 참고하고 싶은 하나를 고르고 이유를 적는다</a:t>
+            </a:r>
+            <a:endParaRPr lang="en-US" sz="1200" dirty="0"/>
+          </a:p>
+        </p:txBody>
+      </p:sp>
+      <p:sp>
+        <p:nvSpPr>
+          <p:cNvPr id="37" name="Shape 35"/>
+          <p:cNvSpPr/>
+          <p:nvPr/>
+        </p:nvSpPr>
+        <p:spPr>
+          <a:xfrm>
+            <a:off x="6297016" y="3950208"/>
+            <a:ext cx="5254600" cy="585216"/>
+          </a:xfrm>
+          <a:prstGeom prst="rect">
+            <a:avLst/>
+          </a:prstGeom>
+          <a:solidFill>
+            <a:srgbClr val="F2F2F2"/>
+          </a:solidFill>
+          <a:ln w="12700">
+            <a:solidFill>
+              <a:srgbClr val="F2F2F2"/>
+            </a:solidFill>
+            <a:prstDash val="solid"/>
+          </a:ln>
+        </p:spPr>
+      </p:sp>
+      <p:sp>
+        <p:nvSpPr>
+          <p:cNvPr id="38" name="Shape 36"/>
+          <p:cNvSpPr/>
+          <p:nvPr/>
+        </p:nvSpPr>
+        <p:spPr>
+          <a:xfrm>
+            <a:off x="6571336" y="4087368"/>
+            <a:ext cx="310896" cy="310896"/>
+          </a:xfrm>
+          <a:prstGeom prst="ellipse">
+            <a:avLst/>
+          </a:prstGeom>
+          <a:solidFill>
+            <a:srgbClr val="F2F2F2"/>
+          </a:solidFill>
+          <a:ln w="12700">
+            <a:solidFill>
+              <a:srgbClr val="111111"/>
+            </a:solidFill>
+            <a:prstDash val="solid"/>
+          </a:ln>
+        </p:spPr>
+      </p:sp>
+      <p:sp>
+        <p:nvSpPr>
+          <p:cNvPr id="39" name="Text 37"/>
+          <p:cNvSpPr/>
+          <p:nvPr/>
+        </p:nvSpPr>
+        <p:spPr>
+          <a:xfrm>
+            <a:off x="6571336" y="4087368"/>
+            <a:ext cx="310896" cy="310896"/>
+          </a:xfrm>
+          <a:prstGeom prst="rect">
+            <a:avLst/>
+          </a:prstGeom>
+          <a:noFill/>
+          <a:ln/>
+        </p:spPr>
+        <p:txBody>
+          <a:bodyPr wrap="square" lIns="0" tIns="0" rIns="0" bIns="0" rtlCol="0" anchor="ctr"/>
+          <a:lstStyle/>
+          <a:p>
+            <a:pPr algn="ctr" indent="0" marL="0">
+              <a:buNone/>
+            </a:pPr>
+            <a:r>
+              <a:rPr lang="en-US" sz="900" b="1" dirty="0">
+                <a:solidFill>
+                  <a:srgbClr val="111111"/>
+                </a:solidFill>
+                <a:latin typeface="Pretendard" pitchFamily="34" charset="0"/>
+                <a:ea typeface="Pretendard" pitchFamily="34" charset="-122"/>
+                <a:cs typeface="Pretendard" pitchFamily="34" charset="-120"/>
+              </a:rPr>
+              <a:t>08</a:t>
+            </a:r>
+            <a:endParaRPr lang="en-US" sz="900" dirty="0"/>
+          </a:p>
+        </p:txBody>
+      </p:sp>
+      <p:sp>
+        <p:nvSpPr>
+          <p:cNvPr id="40" name="Text 38"/>
+          <p:cNvSpPr/>
+          <p:nvPr/>
+        </p:nvSpPr>
+        <p:spPr>
+          <a:xfrm>
+            <a:off x="7010248" y="3950208"/>
+            <a:ext cx="4267048" cy="585216"/>
+          </a:xfrm>
+          <a:prstGeom prst="rect">
+            <a:avLst/>
+          </a:prstGeom>
+          <a:noFill/>
+          <a:ln/>
+        </p:spPr>
+        <p:txBody>
+          <a:bodyPr wrap="square" lIns="0" tIns="0" rIns="0" bIns="0" rtlCol="0" anchor="ctr"/>
+          <a:lstStyle/>
+          <a:p>
+            <a:pPr indent="0" marL="0">
+              <a:buNone/>
+            </a:pPr>
+            <a:r>
+              <a:rPr lang="en-US" sz="1200" dirty="0">
+                <a:solidFill>
+                  <a:srgbClr val="111111"/>
+                </a:solidFill>
+                <a:latin typeface="Pretendard" pitchFamily="34" charset="0"/>
+                <a:ea typeface="Pretendard" pitchFamily="34" charset="-122"/>
+                <a:cs typeface="Pretendard" pitchFamily="34" charset="-120"/>
+              </a:rPr>
+              <a:t>파일명을 '학번_이름_1주차'로 한다</a:t>
+            </a:r>
+            <a:endParaRPr lang="en-US" sz="1200" dirty="0"/>
+          </a:p>
+        </p:txBody>
+      </p:sp>
+      <p:sp>
+        <p:nvSpPr>
+          <p:cNvPr id="41" name="Shape 39"/>
+          <p:cNvSpPr/>
+          <p:nvPr/>
+        </p:nvSpPr>
+        <p:spPr>
+          <a:xfrm>
+            <a:off x="640080" y="4736592"/>
+            <a:ext cx="10911535" cy="7315"/>
+          </a:xfrm>
+          <a:prstGeom prst="rect">
+            <a:avLst/>
+          </a:prstGeom>
+          <a:solidFill>
+            <a:srgbClr val="111111"/>
+          </a:solidFill>
+          <a:ln w="12700">
+            <a:solidFill>
+              <a:srgbClr val="111111"/>
+            </a:solidFill>
+            <a:prstDash val="solid"/>
+          </a:ln>
+        </p:spPr>
+      </p:sp>
+      <p:sp>
+        <p:nvSpPr>
+          <p:cNvPr id="42" name="Text 40"/>
+          <p:cNvSpPr/>
+          <p:nvPr/>
+        </p:nvSpPr>
+        <p:spPr>
+          <a:xfrm>
+            <a:off x="640080" y="4846320"/>
+            <a:ext cx="10911535" cy="402336"/>
+          </a:xfrm>
+          <a:prstGeom prst="rect">
+            <a:avLst/>
+          </a:prstGeom>
+          <a:noFill/>
+          <a:ln/>
+        </p:spPr>
+        <p:txBody>
+          <a:bodyPr wrap="square" lIns="0" tIns="0" rIns="0" bIns="0" rtlCol="0" anchor="ctr"/>
+          <a:lstStyle/>
+          <a:p>
+            <a:pPr indent="0" marL="0">
+              <a:buNone/>
+            </a:pPr>
+            <a:r>
+              <a:rPr lang="en-US" sz="1250" b="1" dirty="0">
+                <a:solidFill>
+                  <a:srgbClr val="111111"/>
+                </a:solidFill>
+                <a:latin typeface="Pretendard" pitchFamily="34" charset="0"/>
+                <a:ea typeface="Pretendard" pitchFamily="34" charset="-122"/>
+                <a:cs typeface="Pretendard" pitchFamily="34" charset="-120"/>
+              </a:rPr>
+              <a:t>3개 모두 비슷한 스타일로 고르면 비교가 되지 않습니다. 일부러 다르게 고르세요.</a:t>
+            </a:r>
+            <a:endParaRPr lang="en-US" sz="1250" dirty="0"/>
+          </a:p>
+        </p:txBody>
+      </p:sp>
+      <p:sp>
+        <p:nvSpPr>
+          <p:cNvPr id="43" name="Shape 41"/>
+          <p:cNvSpPr/>
+          <p:nvPr/>
+        </p:nvSpPr>
+        <p:spPr>
+          <a:xfrm>
+            <a:off x="640080" y="6291072"/>
+            <a:ext cx="10911535" cy="7315"/>
+          </a:xfrm>
+          <a:prstGeom prst="rect">
+            <a:avLst/>
+          </a:prstGeom>
+          <a:solidFill>
+            <a:srgbClr val="DCDCDC"/>
+          </a:solidFill>
+          <a:ln w="12700">
+            <a:solidFill>
+              <a:srgbClr val="DCDCDC"/>
+            </a:solidFill>
+            <a:prstDash val="solid"/>
+          </a:ln>
+        </p:spPr>
+      </p:sp>
+      <p:sp>
+        <p:nvSpPr>
+          <p:cNvPr id="44" name="Text 42"/>
+          <p:cNvSpPr/>
+          <p:nvPr/>
+        </p:nvSpPr>
+        <p:spPr>
+          <a:xfrm>
+            <a:off x="640080" y="6382512"/>
+            <a:ext cx="7772400" cy="237744"/>
+          </a:xfrm>
+          <a:prstGeom prst="rect">
+            <a:avLst/>
+          </a:prstGeom>
+          <a:noFill/>
+          <a:ln/>
+        </p:spPr>
+        <p:txBody>
+          <a:bodyPr wrap="square" lIns="0" tIns="0" rIns="0" bIns="0" rtlCol="0" anchor="ctr"/>
+          <a:lstStyle/>
+          <a:p>
+            <a:pPr indent="0" marL="0">
+              <a:buNone/>
+            </a:pPr>
+            <a:r>
+              <a:rPr lang="en-US" sz="850" spc="40" kern="0" dirty="0">
+                <a:solidFill>
+                  <a:srgbClr val="9B9B9B"/>
+                </a:solidFill>
+                <a:latin typeface="Pretendard" pitchFamily="34" charset="0"/>
+                <a:ea typeface="Pretendard" pitchFamily="34" charset="-122"/>
+                <a:cs typeface="Pretendard" pitchFamily="34" charset="-120"/>
+              </a:rPr>
+              <a:t>포트폴리오제작 · 1주차 OT 및 포트폴리오 이해</a:t>
+            </a:r>
+            <a:endParaRPr lang="en-US" sz="850" dirty="0"/>
+          </a:p>
+        </p:txBody>
+      </p:sp>
+      <p:sp>
+        <p:nvSpPr>
+          <p:cNvPr id="45" name="Text 43"/>
+          <p:cNvSpPr/>
+          <p:nvPr/>
+        </p:nvSpPr>
+        <p:spPr>
+          <a:xfrm>
+            <a:off x="10271455" y="6382512"/>
+            <a:ext cx="1280160" cy="237744"/>
+          </a:xfrm>
+          <a:prstGeom prst="rect">
+            <a:avLst/>
+          </a:prstGeom>
+          <a:noFill/>
+          <a:ln/>
+        </p:spPr>
+        <p:txBody>
+          <a:bodyPr wrap="square" lIns="0" tIns="0" rIns="0" bIns="0" rtlCol="0" anchor="ctr"/>
+          <a:lstStyle/>
+          <a:p>
+            <a:pPr algn="r" indent="0" marL="0">
+              <a:buNone/>
+            </a:pPr>
+            <a:r>
+              <a:rPr lang="en-US" sz="850" spc="140" kern="0" dirty="0">
+                <a:solidFill>
+                  <a:srgbClr val="9B9B9B"/>
+                </a:solidFill>
+                <a:latin typeface="Pretendard" pitchFamily="34" charset="0"/>
+                <a:ea typeface="Pretendard" pitchFamily="34" charset="-122"/>
+                <a:cs typeface="Pretendard" pitchFamily="34" charset="-120"/>
+              </a:rPr>
+              <a:t>P.11</a:t>
+            </a:r>
+            <a:endParaRPr lang="en-US" sz="850" dirty="0"/>
+          </a:p>
+        </p:txBody>
+      </p:sp>
+    </p:spTree>
+  </p:cSld>
+  <p:clrMapOvr>
+    <a:masterClrMapping/>
+  </p:clrMapOvr>
+</p:sld>
+</file>
+
+<file path=ppt/slides/slide17.xml><?xml version="1.0" encoding="utf-8"?>
+<p:sld xmlns:a="http://schemas.openxmlformats.org/drawingml/2006/main" xmlns:r="http://schemas.openxmlformats.org/officeDocument/2006/relationships" xmlns:p="http://schemas.openxmlformats.org/presentationml/2006/main">
+  <p:cSld name="Slide 17">
+    <p:bg>
+      <p:bgPr>
+        <a:solidFill>
+          <a:srgbClr val="FFFFFF"/>
+        </a:solidFill>
+      </p:bgPr>
+    </p:bg>
+    <p:spTree>
+      <p:nvGrpSpPr>
+        <p:cNvPr id="1" name=""/>
+        <p:cNvGrpSpPr/>
+        <p:nvPr/>
+      </p:nvGrpSpPr>
+      <p:grpSpPr>
+        <a:xfrm>
+          <a:off x="0" y="0"/>
+          <a:ext cx="0" cy="0"/>
+          <a:chOff x="0" y="0"/>
+          <a:chExt cx="0" cy="0"/>
+        </a:xfrm>
+      </p:grpSpPr>
+      <p:sp>
+        <p:nvSpPr>
+          <p:cNvPr id="2" name="Text 0"/>
+          <p:cNvSpPr/>
+          <p:nvPr/>
+        </p:nvSpPr>
+        <p:spPr>
+          <a:xfrm>
+            <a:off x="640080" y="274320"/>
+            <a:ext cx="3657600" cy="219456"/>
+          </a:xfrm>
+          <a:prstGeom prst="rect">
+            <a:avLst/>
+          </a:prstGeom>
+          <a:noFill/>
+          <a:ln/>
+        </p:spPr>
+        <p:txBody>
+          <a:bodyPr wrap="square" lIns="0" tIns="0" rIns="0" bIns="0" rtlCol="0" anchor="ctr"/>
+          <a:lstStyle/>
+          <a:p>
+            <a:pPr indent="0" marL="0">
+              <a:buNone/>
+            </a:pPr>
+            <a:r>
+              <a:rPr lang="en-US" sz="900" spc="120" kern="0" dirty="0">
+                <a:solidFill>
+                  <a:srgbClr val="8A8A8A"/>
+                </a:solidFill>
+                <a:latin typeface="Pretendard" pitchFamily="34" charset="0"/>
+                <a:ea typeface="Pretendard" pitchFamily="34" charset="-122"/>
+                <a:cs typeface="Pretendard" pitchFamily="34" charset="-120"/>
+              </a:rPr>
+              <a:t>포트폴리오제작</a:t>
+            </a:r>
+            <a:endParaRPr lang="en-US" sz="900" dirty="0"/>
+          </a:p>
+        </p:txBody>
+      </p:sp>
+      <p:sp>
+        <p:nvSpPr>
+          <p:cNvPr id="3" name="Text 1"/>
+          <p:cNvSpPr/>
+          <p:nvPr/>
+        </p:nvSpPr>
+        <p:spPr>
+          <a:xfrm>
+            <a:off x="4480560" y="274320"/>
+            <a:ext cx="4572000" cy="219456"/>
+          </a:xfrm>
+          <a:prstGeom prst="rect">
+            <a:avLst/>
+          </a:prstGeom>
+          <a:noFill/>
+          <a:ln/>
+        </p:spPr>
+        <p:txBody>
+          <a:bodyPr wrap="square" lIns="0" tIns="0" rIns="0" bIns="0" rtlCol="0" anchor="ctr"/>
+          <a:lstStyle/>
+          <a:p>
+            <a:pPr algn="ctr" indent="0" marL="0">
+              <a:buNone/>
+            </a:pPr>
+            <a:r>
+              <a:rPr lang="en-US" sz="900" spc="120" kern="0" dirty="0">
+                <a:solidFill>
+                  <a:srgbClr val="8A8A8A"/>
+                </a:solidFill>
+                <a:latin typeface="Pretendard" pitchFamily="34" charset="0"/>
+                <a:ea typeface="Pretendard" pitchFamily="34" charset="-122"/>
+                <a:cs typeface="Pretendard" pitchFamily="34" charset="-120"/>
+              </a:rPr>
+              <a:t>PHASE 1 방향 설정과 기획</a:t>
+            </a:r>
+            <a:endParaRPr lang="en-US" sz="900" dirty="0"/>
+          </a:p>
+        </p:txBody>
+      </p:sp>
+      <p:sp>
+        <p:nvSpPr>
+          <p:cNvPr id="4" name="Text 2"/>
+          <p:cNvSpPr/>
+          <p:nvPr/>
+        </p:nvSpPr>
+        <p:spPr>
+          <a:xfrm>
+            <a:off x="8808415" y="274320"/>
+            <a:ext cx="2743200" cy="219456"/>
+          </a:xfrm>
+          <a:prstGeom prst="rect">
+            <a:avLst/>
+          </a:prstGeom>
+          <a:noFill/>
+          <a:ln/>
+        </p:spPr>
+        <p:txBody>
+          <a:bodyPr wrap="square" lIns="0" tIns="0" rIns="0" bIns="0" rtlCol="0" anchor="ctr"/>
+          <a:lstStyle/>
+          <a:p>
+            <a:pPr algn="r" indent="0" marL="0">
+              <a:buNone/>
+            </a:pPr>
+            <a:r>
+              <a:rPr lang="en-US" sz="900" spc="200" kern="0" dirty="0">
+                <a:solidFill>
+                  <a:srgbClr val="8A8A8A"/>
+                </a:solidFill>
+                <a:latin typeface="Pretendard" pitchFamily="34" charset="0"/>
+                <a:ea typeface="Pretendard" pitchFamily="34" charset="-122"/>
+                <a:cs typeface="Pretendard" pitchFamily="34" charset="-120"/>
+              </a:rPr>
+              <a:t>WEEK 01</a:t>
+            </a:r>
+            <a:endParaRPr lang="en-US" sz="900" dirty="0"/>
+          </a:p>
+        </p:txBody>
+      </p:sp>
+      <p:sp>
+        <p:nvSpPr>
+          <p:cNvPr id="5" name="Shape 3"/>
+          <p:cNvSpPr/>
+          <p:nvPr/>
+        </p:nvSpPr>
+        <p:spPr>
+          <a:xfrm>
+            <a:off x="640080" y="548640"/>
+            <a:ext cx="10911535" cy="7315"/>
+          </a:xfrm>
+          <a:prstGeom prst="rect">
+            <a:avLst/>
+          </a:prstGeom>
+          <a:solidFill>
+            <a:srgbClr val="DCDCDC"/>
+          </a:solidFill>
+          <a:ln w="12700">
+            <a:solidFill>
+              <a:srgbClr val="DCDCDC"/>
+            </a:solidFill>
+            <a:prstDash val="solid"/>
+          </a:ln>
+        </p:spPr>
+      </p:sp>
+      <p:sp>
+        <p:nvSpPr>
+          <p:cNvPr id="6" name="Text 4"/>
+          <p:cNvSpPr/>
+          <p:nvPr/>
+        </p:nvSpPr>
+        <p:spPr>
+          <a:xfrm>
+            <a:off x="640080" y="640080"/>
+            <a:ext cx="10911535" cy="219456"/>
+          </a:xfrm>
+          <a:prstGeom prst="rect">
+            <a:avLst/>
+          </a:prstGeom>
+          <a:noFill/>
+          <a:ln/>
+        </p:spPr>
+        <p:txBody>
+          <a:bodyPr wrap="square" lIns="0" tIns="0" rIns="0" bIns="0" rtlCol="0" anchor="ctr"/>
+          <a:lstStyle/>
+          <a:p>
+            <a:pPr indent="0" marL="0">
+              <a:buNone/>
+            </a:pPr>
+            <a:r>
+              <a:rPr lang="en-US" sz="950" spc="260" kern="0" dirty="0">
+                <a:solidFill>
+                  <a:srgbClr val="8A8A8A"/>
+                </a:solidFill>
+                <a:latin typeface="Pretendard" pitchFamily="34" charset="0"/>
+                <a:ea typeface="Pretendard" pitchFamily="34" charset="-122"/>
+                <a:cs typeface="Pretendard" pitchFamily="34" charset="-120"/>
+              </a:rPr>
+              <a:t>HOMEWORK</a:t>
+            </a:r>
+            <a:endParaRPr lang="en-US" sz="950" dirty="0"/>
+          </a:p>
+        </p:txBody>
+      </p:sp>
+      <p:sp>
+        <p:nvSpPr>
+          <p:cNvPr id="7" name="Text 5"/>
+          <p:cNvSpPr/>
+          <p:nvPr/>
+        </p:nvSpPr>
+        <p:spPr>
+          <a:xfrm>
+            <a:off x="640080" y="859536"/>
+            <a:ext cx="10911535" cy="475488"/>
+          </a:xfrm>
+          <a:prstGeom prst="rect">
+            <a:avLst/>
+          </a:prstGeom>
+          <a:noFill/>
+          <a:ln/>
+        </p:spPr>
+        <p:txBody>
+          <a:bodyPr wrap="square" lIns="0" tIns="0" rIns="0" bIns="0" rtlCol="0" anchor="ctr"/>
+          <a:lstStyle/>
+          <a:p>
+            <a:pPr indent="0" marL="0">
+              <a:buNone/>
+            </a:pPr>
+            <a:r>
+              <a:rPr lang="en-US" sz="3000" dirty="0">
+                <a:solidFill>
+                  <a:srgbClr val="111111"/>
+                </a:solidFill>
+                <a:latin typeface="Pretendard Black" pitchFamily="34" charset="0"/>
+                <a:ea typeface="Pretendard Black" pitchFamily="34" charset="-122"/>
+                <a:cs typeface="Pretendard Black" pitchFamily="34" charset="-120"/>
+              </a:rPr>
               <a:t>과제와 다음 주</a:t>
             </a:r>
             <a:endParaRPr lang="en-US" sz="3000" dirty="0"/>
@@ -10801,7 +11864,7 @@
                 <a:ea typeface="Pretendard" pitchFamily="34" charset="-122"/>
                 <a:cs typeface="Pretendard" pitchFamily="34" charset="-120"/>
               </a:rPr>
-              <a:t>P.11</a:t>
+              <a:t>P.12</a:t>
             </a:r>
             <a:endParaRPr lang="en-US" sz="850" dirty="0"/>
           </a:p>
@@ -11053,7 +12116,7 @@
                 <a:ea typeface="Pretendard Black" pitchFamily="34" charset="-122"/>
                 <a:cs typeface="Pretendard Black" pitchFamily="34" charset="-120"/>
               </a:rPr>
-              <a:t>오늘의 90분</a:t>
+              <a:t>오늘의 120분</a:t>
             </a:r>
             <a:endParaRPr lang="en-US" sz="3000" dirty="0"/>
           </a:p>
@@ -11092,7 +12155,7 @@
                 <a:ea typeface="Pretendard" pitchFamily="34" charset="-122"/>
                 <a:cs typeface="Pretendard" pitchFamily="34" charset="-120"/>
               </a:rPr>
-              <a:t>OT 15분 · 강의 60분 · Q&amp;A 15분</a:t>
+              <a:t>OT 15분 · 강의 70분 · 실습 15분 · 안내와 Q&amp;A 10분</a:t>
             </a:r>
             <a:endParaRPr lang="en-US" sz="1150" dirty="0"/>
           </a:p>
@@ -11132,7 +12195,7 @@
         <p:spPr>
           <a:xfrm>
             <a:off x="640080" y="1719072"/>
-            <a:ext cx="1600200" cy="932688"/>
+            <a:ext cx="1600200" cy="691896"/>
           </a:xfrm>
           <a:prstGeom prst="rect">
             <a:avLst/>
@@ -11171,7 +12234,7 @@
         <p:spPr>
           <a:xfrm>
             <a:off x="2377440" y="1719072"/>
-            <a:ext cx="6888175" cy="932688"/>
+            <a:ext cx="6888175" cy="691896"/>
           </a:xfrm>
           <a:prstGeom prst="rect">
             <a:avLst/>
@@ -11210,7 +12273,7 @@
         <p:spPr>
           <a:xfrm>
             <a:off x="9265615" y="1719072"/>
-            <a:ext cx="2286000" cy="932688"/>
+            <a:ext cx="2286000" cy="691896"/>
           </a:xfrm>
           <a:prstGeom prst="rect">
             <a:avLst/>
@@ -11248,7 +12311,7 @@
         </p:nvSpPr>
         <p:spPr>
           <a:xfrm>
-            <a:off x="640080" y="2633472"/>
+            <a:off x="640080" y="2392680"/>
             <a:ext cx="10911535" cy="7315"/>
           </a:xfrm>
           <a:prstGeom prst="rect">
@@ -11273,8 +12336,8 @@
         </p:nvSpPr>
         <p:spPr>
           <a:xfrm>
-            <a:off x="640080" y="2651760"/>
-            <a:ext cx="1600200" cy="932688"/>
+            <a:off x="640080" y="2410968"/>
+            <a:ext cx="1600200" cy="691896"/>
           </a:xfrm>
           <a:prstGeom prst="rect">
             <a:avLst/>
@@ -11298,7 +12361,7 @@
                 <a:ea typeface="Pretendard" pitchFamily="34" charset="-122"/>
                 <a:cs typeface="Pretendard" pitchFamily="34" charset="-120"/>
               </a:rPr>
-              <a:t>00:15–01:15</a:t>
+              <a:t>00:15–00:55</a:t>
             </a:r>
             <a:endParaRPr lang="en-US" sz="1050" dirty="0"/>
           </a:p>
@@ -11312,8 +12375,8 @@
         </p:nvSpPr>
         <p:spPr>
           <a:xfrm>
-            <a:off x="2377440" y="2651760"/>
-            <a:ext cx="6888175" cy="932688"/>
+            <a:off x="2377440" y="2410968"/>
+            <a:ext cx="6888175" cy="691896"/>
           </a:xfrm>
           <a:prstGeom prst="rect">
             <a:avLst/>
@@ -11337,7 +12400,7 @@
                 <a:ea typeface="Pretendard" pitchFamily="34" charset="-122"/>
                 <a:cs typeface="Pretendard" pitchFamily="34" charset="-120"/>
               </a:rPr>
-              <a:t>포트폴리오 트렌드 강의</a:t>
+              <a:t>PART 1 — 포트폴리오는 무엇을 하는가</a:t>
             </a:r>
             <a:endParaRPr lang="en-US" sz="1300" dirty="0"/>
           </a:p>
@@ -11351,8 +12414,8 @@
         </p:nvSpPr>
         <p:spPr>
           <a:xfrm>
-            <a:off x="9265615" y="2651760"/>
-            <a:ext cx="2286000" cy="932688"/>
+            <a:off x="9265615" y="2410968"/>
+            <a:ext cx="2286000" cy="691896"/>
           </a:xfrm>
           <a:prstGeom prst="rect">
             <a:avLst/>
@@ -11390,7 +12453,7 @@
         </p:nvSpPr>
         <p:spPr>
           <a:xfrm>
-            <a:off x="640080" y="3566160"/>
+            <a:off x="640080" y="3084576"/>
             <a:ext cx="10911535" cy="7315"/>
           </a:xfrm>
           <a:prstGeom prst="rect">
@@ -11415,8 +12478,111 @@
         </p:nvSpPr>
         <p:spPr>
           <a:xfrm>
-            <a:off x="640080" y="3584448"/>
-            <a:ext cx="1600200" cy="932688"/>
+            <a:off x="640080" y="3102864"/>
+            <a:ext cx="1600200" cy="691896"/>
+          </a:xfrm>
+          <a:prstGeom prst="rect">
+            <a:avLst/>
+          </a:prstGeom>
+          <a:noFill/>
+          <a:ln/>
+        </p:spPr>
+        <p:txBody>
+          <a:bodyPr wrap="square" lIns="0" tIns="0" rIns="0" bIns="0" rtlCol="0" anchor="ctr"/>
+          <a:lstStyle/>
+          <a:p>
+            <a:pPr indent="0" marL="0">
+              <a:buNone/>
+            </a:pPr>
+            <a:r>
+              <a:rPr lang="en-US" sz="1050" spc="60" kern="0" dirty="0">
+                <a:solidFill>
+                  <a:srgbClr val="9B9B9B"/>
+                </a:solidFill>
+                <a:latin typeface="Pretendard" pitchFamily="34" charset="0"/>
+                <a:ea typeface="Pretendard" pitchFamily="34" charset="-122"/>
+                <a:cs typeface="Pretendard" pitchFamily="34" charset="-120"/>
+              </a:rPr>
+              <a:t>00:55–01:05</a:t>
+            </a:r>
+            <a:endParaRPr lang="en-US" sz="1050" dirty="0"/>
+          </a:p>
+        </p:txBody>
+      </p:sp>
+      <p:sp>
+        <p:nvSpPr>
+          <p:cNvPr id="19" name="Text 17"/>
+          <p:cNvSpPr/>
+          <p:nvPr/>
+        </p:nvSpPr>
+        <p:spPr>
+          <a:xfrm>
+            <a:off x="2377440" y="3102864"/>
+            <a:ext cx="6888175" cy="691896"/>
+          </a:xfrm>
+          <a:prstGeom prst="rect">
+            <a:avLst/>
+          </a:prstGeom>
+          <a:noFill/>
+          <a:ln/>
+        </p:spPr>
+        <p:txBody>
+          <a:bodyPr wrap="square" lIns="0" tIns="0" rIns="0" bIns="0" rtlCol="0" anchor="ctr"/>
+          <a:lstStyle/>
+          <a:p>
+            <a:pPr indent="0" marL="0">
+              <a:buNone/>
+            </a:pPr>
+            <a:r>
+              <a:rPr lang="en-US" sz="1100" dirty="0">
+                <a:solidFill>
+                  <a:srgbClr val="9B9B9B"/>
+                </a:solidFill>
+                <a:latin typeface="Pretendard" pitchFamily="34" charset="0"/>
+                <a:ea typeface="Pretendard" pitchFamily="34" charset="-122"/>
+                <a:cs typeface="Pretendard" pitchFamily="34" charset="-120"/>
+              </a:rPr>
+              <a:t>휴식</a:t>
+            </a:r>
+            <a:endParaRPr lang="en-US" sz="1100" dirty="0"/>
+          </a:p>
+        </p:txBody>
+      </p:sp>
+      <p:sp>
+        <p:nvSpPr>
+          <p:cNvPr id="20" name="Shape 18"/>
+          <p:cNvSpPr/>
+          <p:nvPr/>
+        </p:nvSpPr>
+        <p:spPr>
+          <a:xfrm>
+            <a:off x="640080" y="3776472"/>
+            <a:ext cx="10911535" cy="7315"/>
+          </a:xfrm>
+          <a:prstGeom prst="rect">
+            <a:avLst/>
+          </a:prstGeom>
+          <a:solidFill>
+            <a:srgbClr val="EFEFEF"/>
+          </a:solidFill>
+          <a:ln w="12700">
+            <a:solidFill>
+              <a:srgbClr val="EFEFEF"/>
+            </a:solidFill>
+            <a:prstDash val="solid"/>
+          </a:ln>
+        </p:spPr>
+      </p:sp>
+      <p:sp>
+        <p:nvSpPr>
+          <p:cNvPr id="21" name="Text 19"/>
+          <p:cNvSpPr/>
+          <p:nvPr/>
+        </p:nvSpPr>
+        <p:spPr>
+          <a:xfrm>
+            <a:off x="640080" y="3794760"/>
+            <a:ext cx="1600200" cy="691896"/>
           </a:xfrm>
           <a:prstGeom prst="rect">
             <a:avLst/>
@@ -11440,7 +12606,7 @@
                 <a:ea typeface="Pretendard" pitchFamily="34" charset="-122"/>
                 <a:cs typeface="Pretendard" pitchFamily="34" charset="-120"/>
               </a:rPr>
-              <a:t>01:15–01:30</a:t>
+              <a:t>01:05–01:35</a:t>
             </a:r>
             <a:endParaRPr lang="en-US" sz="1050" dirty="0"/>
           </a:p>
@@ -11448,14 +12614,14 @@
       </p:sp>
       <p:sp>
         <p:nvSpPr>
-          <p:cNvPr id="19" name="Text 17"/>
-          <p:cNvSpPr/>
-          <p:nvPr/>
-        </p:nvSpPr>
-        <p:spPr>
-          <a:xfrm>
-            <a:off x="2377440" y="3584448"/>
-            <a:ext cx="6888175" cy="932688"/>
+          <p:cNvPr id="22" name="Text 20"/>
+          <p:cNvSpPr/>
+          <p:nvPr/>
+        </p:nvSpPr>
+        <p:spPr>
+          <a:xfrm>
+            <a:off x="2377440" y="3794760"/>
+            <a:ext cx="6888175" cy="691896"/>
           </a:xfrm>
           <a:prstGeom prst="rect">
             <a:avLst/>
@@ -11479,7 +12645,7 @@
                 <a:ea typeface="Pretendard" pitchFamily="34" charset="-122"/>
                 <a:cs typeface="Pretendard" pitchFamily="34" charset="-120"/>
               </a:rPr>
-              <a:t>Q&amp;A 및 과제 안내</a:t>
+              <a:t>PART 2 — 요즘은 어떻게 보나</a:t>
             </a:r>
             <a:endParaRPr lang="en-US" sz="1300" dirty="0"/>
           </a:p>
@@ -11487,14 +12653,14 @@
       </p:sp>
       <p:sp>
         <p:nvSpPr>
-          <p:cNvPr id="20" name="Text 18"/>
-          <p:cNvSpPr/>
-          <p:nvPr/>
-        </p:nvSpPr>
-        <p:spPr>
-          <a:xfrm>
-            <a:off x="9265615" y="3584448"/>
-            <a:ext cx="2286000" cy="932688"/>
+          <p:cNvPr id="23" name="Text 21"/>
+          <p:cNvSpPr/>
+          <p:nvPr/>
+        </p:nvSpPr>
+        <p:spPr>
+          <a:xfrm>
+            <a:off x="9265615" y="3794760"/>
+            <a:ext cx="2286000" cy="691896"/>
           </a:xfrm>
           <a:prstGeom prst="rect">
             <a:avLst/>
@@ -11518,7 +12684,7 @@
                 <a:ea typeface="Pretendard" pitchFamily="34" charset="-122"/>
                 <a:cs typeface="Pretendard" pitchFamily="34" charset="-120"/>
               </a:rPr>
-              <a:t>질의 + 안내</a:t>
+              <a:t>강의 + 사례</a:t>
             </a:r>
             <a:endParaRPr lang="en-US" sz="1050" dirty="0"/>
           </a:p>
@@ -11526,14 +12692,298 @@
       </p:sp>
       <p:sp>
         <p:nvSpPr>
-          <p:cNvPr id="21" name="Shape 19"/>
-          <p:cNvSpPr/>
-          <p:nvPr/>
-        </p:nvSpPr>
-        <p:spPr>
-          <a:xfrm>
-            <a:off x="640080" y="4828032"/>
-            <a:ext cx="10911535" cy="969264"/>
+          <p:cNvPr id="24" name="Shape 22"/>
+          <p:cNvSpPr/>
+          <p:nvPr/>
+        </p:nvSpPr>
+        <p:spPr>
+          <a:xfrm>
+            <a:off x="640080" y="4468368"/>
+            <a:ext cx="10911535" cy="7315"/>
+          </a:xfrm>
+          <a:prstGeom prst="rect">
+            <a:avLst/>
+          </a:prstGeom>
+          <a:solidFill>
+            <a:srgbClr val="DCDCDC"/>
+          </a:solidFill>
+          <a:ln w="12700">
+            <a:solidFill>
+              <a:srgbClr val="DCDCDC"/>
+            </a:solidFill>
+            <a:prstDash val="solid"/>
+          </a:ln>
+        </p:spPr>
+      </p:sp>
+      <p:sp>
+        <p:nvSpPr>
+          <p:cNvPr id="25" name="Text 23"/>
+          <p:cNvSpPr/>
+          <p:nvPr/>
+        </p:nvSpPr>
+        <p:spPr>
+          <a:xfrm>
+            <a:off x="640080" y="4486656"/>
+            <a:ext cx="1600200" cy="691896"/>
+          </a:xfrm>
+          <a:prstGeom prst="rect">
+            <a:avLst/>
+          </a:prstGeom>
+          <a:noFill/>
+          <a:ln/>
+        </p:spPr>
+        <p:txBody>
+          <a:bodyPr wrap="square" lIns="0" tIns="0" rIns="0" bIns="0" rtlCol="0" anchor="ctr"/>
+          <a:lstStyle/>
+          <a:p>
+            <a:pPr indent="0" marL="0">
+              <a:buNone/>
+            </a:pPr>
+            <a:r>
+              <a:rPr lang="en-US" sz="1050" b="1" spc="60" kern="0" dirty="0">
+                <a:solidFill>
+                  <a:srgbClr val="111111"/>
+                </a:solidFill>
+                <a:latin typeface="Pretendard" pitchFamily="34" charset="0"/>
+                <a:ea typeface="Pretendard" pitchFamily="34" charset="-122"/>
+                <a:cs typeface="Pretendard" pitchFamily="34" charset="-120"/>
+              </a:rPr>
+              <a:t>01:35–01:50</a:t>
+            </a:r>
+            <a:endParaRPr lang="en-US" sz="1050" dirty="0"/>
+          </a:p>
+        </p:txBody>
+      </p:sp>
+      <p:sp>
+        <p:nvSpPr>
+          <p:cNvPr id="26" name="Text 24"/>
+          <p:cNvSpPr/>
+          <p:nvPr/>
+        </p:nvSpPr>
+        <p:spPr>
+          <a:xfrm>
+            <a:off x="2377440" y="4486656"/>
+            <a:ext cx="6888175" cy="691896"/>
+          </a:xfrm>
+          <a:prstGeom prst="rect">
+            <a:avLst/>
+          </a:prstGeom>
+          <a:noFill/>
+          <a:ln/>
+        </p:spPr>
+        <p:txBody>
+          <a:bodyPr wrap="square" lIns="0" tIns="0" rIns="0" bIns="0" rtlCol="0" anchor="ctr"/>
+          <a:lstStyle/>
+          <a:p>
+            <a:pPr indent="0" marL="0">
+              <a:buNone/>
+            </a:pPr>
+            <a:r>
+              <a:rPr lang="en-US" sz="1300" b="1" dirty="0">
+                <a:solidFill>
+                  <a:srgbClr val="111111"/>
+                </a:solidFill>
+                <a:latin typeface="Pretendard" pitchFamily="34" charset="0"/>
+                <a:ea typeface="Pretendard" pitchFamily="34" charset="-122"/>
+                <a:cs typeface="Pretendard" pitchFamily="34" charset="-120"/>
+              </a:rPr>
+              <a:t>실습 — 스크랩 후보 고르기</a:t>
+            </a:r>
+            <a:endParaRPr lang="en-US" sz="1300" dirty="0"/>
+          </a:p>
+        </p:txBody>
+      </p:sp>
+      <p:sp>
+        <p:nvSpPr>
+          <p:cNvPr id="27" name="Text 25"/>
+          <p:cNvSpPr/>
+          <p:nvPr/>
+        </p:nvSpPr>
+        <p:spPr>
+          <a:xfrm>
+            <a:off x="9265615" y="4486656"/>
+            <a:ext cx="2286000" cy="691896"/>
+          </a:xfrm>
+          <a:prstGeom prst="rect">
+            <a:avLst/>
+          </a:prstGeom>
+          <a:noFill/>
+          <a:ln/>
+        </p:spPr>
+        <p:txBody>
+          <a:bodyPr wrap="square" lIns="0" tIns="0" rIns="0" bIns="0" rtlCol="0" anchor="ctr"/>
+          <a:lstStyle/>
+          <a:p>
+            <a:pPr algn="r" indent="0" marL="0">
+              <a:buNone/>
+            </a:pPr>
+            <a:r>
+              <a:rPr lang="en-US" sz="1050" dirty="0">
+                <a:solidFill>
+                  <a:srgbClr val="6E6E6E"/>
+                </a:solidFill>
+                <a:latin typeface="Pretendard" pitchFamily="34" charset="0"/>
+                <a:ea typeface="Pretendard" pitchFamily="34" charset="-122"/>
+                <a:cs typeface="Pretendard" pitchFamily="34" charset="-120"/>
+              </a:rPr>
+              <a:t>개인 워크 + 공유</a:t>
+            </a:r>
+            <a:endParaRPr lang="en-US" sz="1050" dirty="0"/>
+          </a:p>
+        </p:txBody>
+      </p:sp>
+      <p:sp>
+        <p:nvSpPr>
+          <p:cNvPr id="28" name="Shape 26"/>
+          <p:cNvSpPr/>
+          <p:nvPr/>
+        </p:nvSpPr>
+        <p:spPr>
+          <a:xfrm>
+            <a:off x="640080" y="5160264"/>
+            <a:ext cx="10911535" cy="7315"/>
+          </a:xfrm>
+          <a:prstGeom prst="rect">
+            <a:avLst/>
+          </a:prstGeom>
+          <a:solidFill>
+            <a:srgbClr val="DCDCDC"/>
+          </a:solidFill>
+          <a:ln w="12700">
+            <a:solidFill>
+              <a:srgbClr val="DCDCDC"/>
+            </a:solidFill>
+            <a:prstDash val="solid"/>
+          </a:ln>
+        </p:spPr>
+      </p:sp>
+      <p:sp>
+        <p:nvSpPr>
+          <p:cNvPr id="29" name="Text 27"/>
+          <p:cNvSpPr/>
+          <p:nvPr/>
+        </p:nvSpPr>
+        <p:spPr>
+          <a:xfrm>
+            <a:off x="640080" y="5178552"/>
+            <a:ext cx="1600200" cy="691896"/>
+          </a:xfrm>
+          <a:prstGeom prst="rect">
+            <a:avLst/>
+          </a:prstGeom>
+          <a:noFill/>
+          <a:ln/>
+        </p:spPr>
+        <p:txBody>
+          <a:bodyPr wrap="square" lIns="0" tIns="0" rIns="0" bIns="0" rtlCol="0" anchor="ctr"/>
+          <a:lstStyle/>
+          <a:p>
+            <a:pPr indent="0" marL="0">
+              <a:buNone/>
+            </a:pPr>
+            <a:r>
+              <a:rPr lang="en-US" sz="1050" b="1" spc="60" kern="0" dirty="0">
+                <a:solidFill>
+                  <a:srgbClr val="111111"/>
+                </a:solidFill>
+                <a:latin typeface="Pretendard" pitchFamily="34" charset="0"/>
+                <a:ea typeface="Pretendard" pitchFamily="34" charset="-122"/>
+                <a:cs typeface="Pretendard" pitchFamily="34" charset="-120"/>
+              </a:rPr>
+              <a:t>01:50–02:00</a:t>
+            </a:r>
+            <a:endParaRPr lang="en-US" sz="1050" dirty="0"/>
+          </a:p>
+        </p:txBody>
+      </p:sp>
+      <p:sp>
+        <p:nvSpPr>
+          <p:cNvPr id="30" name="Text 28"/>
+          <p:cNvSpPr/>
+          <p:nvPr/>
+        </p:nvSpPr>
+        <p:spPr>
+          <a:xfrm>
+            <a:off x="2377440" y="5178552"/>
+            <a:ext cx="6888175" cy="691896"/>
+          </a:xfrm>
+          <a:prstGeom prst="rect">
+            <a:avLst/>
+          </a:prstGeom>
+          <a:noFill/>
+          <a:ln/>
+        </p:spPr>
+        <p:txBody>
+          <a:bodyPr wrap="square" lIns="0" tIns="0" rIns="0" bIns="0" rtlCol="0" anchor="ctr"/>
+          <a:lstStyle/>
+          <a:p>
+            <a:pPr indent="0" marL="0">
+              <a:buNone/>
+            </a:pPr>
+            <a:r>
+              <a:rPr lang="en-US" sz="1300" b="1" dirty="0">
+                <a:solidFill>
+                  <a:srgbClr val="111111"/>
+                </a:solidFill>
+                <a:latin typeface="Pretendard" pitchFamily="34" charset="0"/>
+                <a:ea typeface="Pretendard" pitchFamily="34" charset="-122"/>
+                <a:cs typeface="Pretendard" pitchFamily="34" charset="-120"/>
+              </a:rPr>
+              <a:t>15주 흐름 · Q&amp;A · 과제 안내</a:t>
+            </a:r>
+            <a:endParaRPr lang="en-US" sz="1300" dirty="0"/>
+          </a:p>
+        </p:txBody>
+      </p:sp>
+      <p:sp>
+        <p:nvSpPr>
+          <p:cNvPr id="31" name="Text 29"/>
+          <p:cNvSpPr/>
+          <p:nvPr/>
+        </p:nvSpPr>
+        <p:spPr>
+          <a:xfrm>
+            <a:off x="9265615" y="5178552"/>
+            <a:ext cx="2286000" cy="691896"/>
+          </a:xfrm>
+          <a:prstGeom prst="rect">
+            <a:avLst/>
+          </a:prstGeom>
+          <a:noFill/>
+          <a:ln/>
+        </p:spPr>
+        <p:txBody>
+          <a:bodyPr wrap="square" lIns="0" tIns="0" rIns="0" bIns="0" rtlCol="0" anchor="ctr"/>
+          <a:lstStyle/>
+          <a:p>
+            <a:pPr algn="r" indent="0" marL="0">
+              <a:buNone/>
+            </a:pPr>
+            <a:r>
+              <a:rPr lang="en-US" sz="1050" dirty="0">
+                <a:solidFill>
+                  <a:srgbClr val="6E6E6E"/>
+                </a:solidFill>
+                <a:latin typeface="Pretendard" pitchFamily="34" charset="0"/>
+                <a:ea typeface="Pretendard" pitchFamily="34" charset="-122"/>
+                <a:cs typeface="Pretendard" pitchFamily="34" charset="-120"/>
+              </a:rPr>
+              <a:t>안내 + 질의</a:t>
+            </a:r>
+            <a:endParaRPr lang="en-US" sz="1050" dirty="0"/>
+          </a:p>
+        </p:txBody>
+      </p:sp>
+      <p:sp>
+        <p:nvSpPr>
+          <p:cNvPr id="32" name="Shape 30"/>
+          <p:cNvSpPr/>
+          <p:nvPr/>
+        </p:nvSpPr>
+        <p:spPr>
+          <a:xfrm>
+            <a:off x="640080" y="5852160"/>
+            <a:ext cx="10911535" cy="7315"/>
           </a:xfrm>
           <a:prstGeom prst="rect">
             <a:avLst/>
@@ -11551,88 +13001,7 @@
       </p:sp>
       <p:sp>
         <p:nvSpPr>
-          <p:cNvPr id="22" name="Text 20"/>
-          <p:cNvSpPr/>
-          <p:nvPr/>
-        </p:nvSpPr>
-        <p:spPr>
-          <a:xfrm>
-            <a:off x="1097280" y="5010912"/>
-            <a:ext cx="2743200" cy="256032"/>
-          </a:xfrm>
-          <a:prstGeom prst="rect">
-            <a:avLst/>
-          </a:prstGeom>
-          <a:noFill/>
-          <a:ln/>
-        </p:spPr>
-        <p:txBody>
-          <a:bodyPr wrap="square" lIns="0" tIns="0" rIns="0" bIns="0" rtlCol="0" anchor="ctr"/>
-          <a:lstStyle/>
-          <a:p>
-            <a:pPr indent="0" marL="0">
-              <a:buNone/>
-            </a:pPr>
-            <a:r>
-              <a:rPr lang="en-US" sz="950" spc="240" kern="0" dirty="0">
-                <a:solidFill>
-                  <a:srgbClr val="9A9A9A"/>
-                </a:solidFill>
-                <a:latin typeface="Pretendard" pitchFamily="34" charset="0"/>
-                <a:ea typeface="Pretendard" pitchFamily="34" charset="-122"/>
-                <a:cs typeface="Pretendard" pitchFamily="34" charset="-120"/>
-              </a:rPr>
-              <a:t>오늘 끝나면</a:t>
-            </a:r>
-            <a:endParaRPr lang="en-US" sz="950" dirty="0"/>
-          </a:p>
-        </p:txBody>
-      </p:sp>
-      <p:sp>
-        <p:nvSpPr>
-          <p:cNvPr id="23" name="Text 21"/>
-          <p:cNvSpPr/>
-          <p:nvPr/>
-        </p:nvSpPr>
-        <p:spPr>
-          <a:xfrm>
-            <a:off x="1097280" y="5285232"/>
-            <a:ext cx="9997135" cy="365760"/>
-          </a:xfrm>
-          <a:prstGeom prst="rect">
-            <a:avLst/>
-          </a:prstGeom>
-          <a:noFill/>
-          <a:ln/>
-        </p:spPr>
-        <p:txBody>
-          <a:bodyPr wrap="square" lIns="0" tIns="0" rIns="0" bIns="0" rtlCol="0" anchor="ctr"/>
-          <a:lstStyle/>
-          <a:p>
-            <a:pPr indent="0" marL="0">
-              <a:lnSpc>
-                <a:spcPct val="126000"/>
-              </a:lnSpc>
-              <a:buNone/>
-            </a:pPr>
-            <a:r>
-              <a:rPr lang="en-US" sz="1600" dirty="0">
-                <a:solidFill>
-                  <a:srgbClr val="FFFFFF"/>
-                </a:solidFill>
-                <a:latin typeface="Pretendard Black" pitchFamily="34" charset="0"/>
-                <a:ea typeface="Pretendard Black" pitchFamily="34" charset="-122"/>
-                <a:cs typeface="Pretendard Black" pitchFamily="34" charset="-120"/>
-              </a:rPr>
-              <a:t>포트폴리오가 어디서 어떻게 읽히는지 알고, 스크랩할 사례를 어떤 기준으로 고를지 정하게 됩니다.</a:t>
-            </a:r>
-            <a:endParaRPr lang="en-US" sz="1600" dirty="0"/>
-          </a:p>
-        </p:txBody>
-      </p:sp>
-      <p:sp>
-        <p:nvSpPr>
-          <p:cNvPr id="24" name="Shape 22"/>
+          <p:cNvPr id="33" name="Shape 31"/>
           <p:cNvSpPr/>
           <p:nvPr/>
         </p:nvSpPr>
@@ -11657,7 +13026,7 @@
       </p:sp>
       <p:sp>
         <p:nvSpPr>
-          <p:cNvPr id="25" name="Text 23"/>
+          <p:cNvPr id="34" name="Text 32"/>
           <p:cNvSpPr/>
           <p:nvPr/>
         </p:nvSpPr>
@@ -11696,7 +13065,7 @@
       </p:sp>
       <p:sp>
         <p:nvSpPr>
-          <p:cNvPr id="26" name="Text 24"/>
+          <p:cNvPr id="35" name="Text 33"/>
           <p:cNvSpPr/>
           <p:nvPr/>
         </p:nvSpPr>

--- a/dist/weeks-포트폴리오제작/포트폴리오제작_01주차_OT.pptx
+++ b/dist/weeks-포트폴리오제작/포트폴리오제작_01주차_OT.pptx
@@ -518,7 +518,13 @@
           <a:p>
             <a:r>
               <a:rPr lang="en-US" dirty="0"/>
-              <a:t>첫 수업이라 듣는 시간이 길다. 60분 강의를 한 번에 끌지 말고 20분마다 질문을 던져 끊을 것. 마지막 15분 과제 안내는 반드시 화면에 띄운 채로 진행한다.</a:t>
+              <a:t>[말할 내용]
+안녕하세요. 포트폴리오제작 첫 시간입니다.
+이 수업은 15주 동안 여러분 각자의 포트폴리오를 한 벌 완성해서, 마지막 주에 발표까지 하는 과목입니다. 매주 화요일 저녁 두 시간, 온라인으로 만납니다.
+오늘은 만들기 전에 '포트폴리오가 대체 뭘 하는 물건인지'부터 정리하고, 학기 운영 방식을 안내하겠습니다.
+시작하기 전에 한 가지만 — 이 수업은 강의를 듣는 시간보다 여러분이 손을 움직이는 시간이 깁니다. 매주 과제가 있고, 그 과제가 다음 주 수업의 재료가 됩니다. 과제를 안 해 오시면 그 주 수업이 헛돕니다.
+[운영 메모]
+첫 수업이라 듣는 시간이 길다. 60분 강의를 한 번에 끌지 말고 20분마다 질문을 던져 끊을 것. 마지막 15분 과제 안내는 반드시 화면에 띄운 채로 진행한다.</a:t>
             </a:r>
             <a:endParaRPr lang="en-US" dirty="0"/>
           </a:p>
@@ -606,7 +612,15 @@
           <a:p>
             <a:r>
               <a:rPr lang="en-US" dirty="0"/>
-              <a:t>수치를 인용하지 말 것. 실제 공고 캡처를 몇 개 준비해 근거로 보여주는 편이 훨씬 설득력 있다.</a:t>
+              <a:t>[말할 내용]
+네 가지가 눈에 띕니다.
+첫째, 링크 제출이 기본이 됐습니다. 파일 첨부만 받는 곳이 줄었어요. 그래서 12주차에 온라인 포트폴리오를 만듭니다.
+둘째, 요약본을 따로 요구합니다. 전체와 별개로 짧은 버전이 필요합니다.
+셋째, 과정 서술을 명시적으로 요구합니다. '결과만 말고 과정을 보여 달라'가 공고 문구에 들어갑니다.
+넷째, 개인 기여도를 별도로 묻습니다. 팀 작업에서 뭘 했는지요.
+이 네 가지가 이 수업 커리큘럼이 이렇게 짜인 이유입니다.
+[운영 메모]
+수치를 인용하지 말 것. 실제 공고 캡처를 몇 개 준비해 근거로 보여주는 편이 훨씬 설득력 있다.</a:t>
             </a:r>
             <a:endParaRPr lang="en-US" dirty="0"/>
           </a:p>
@@ -694,7 +708,14 @@
           <a:p>
             <a:r>
               <a:rPr lang="en-US" dirty="0"/>
-              <a:t>학생들이 Dribbble을 주 포트폴리오로 쓰려는 경우가 있다. 정보량이 부족해 서류에서 불리하다는 점을 짚을 것.</a:t>
+              <a:t>[말할 내용]
+어디에 올릴지도 정해야 합니다.
+Behance는 프로젝트 단위로 길게 펼치기 좋습니다. 국내외 채용 담당자 접근성도 높고요. 다만 이미지 위주로 소비되니 글이 길면 안 읽힙니다.
+Dribbble은 화면 한 장, 디테일 보여 주기에 맞습니다. 주 포트폴리오로 쓰기엔 정보량이 부족하고, 레퍼런스 수집처로 더 유용합니다.
+개인 사이트나 Notion은 구조를 내가 정할 수 있습니다. 대신 도메인과 링크 관리가 필요합니다.
+하나만 고를 필요는 없습니다. 다만 '어디를 대표로 둘지'는 정해야 링크를 하나로 낼 수 있습니다. 12주차에 이 방향으로 제작합니다.
+[운영 메모]
+학생들이 Dribbble을 주 포트폴리오로 쓰려는 경우가 있다. 정보량이 부족해 서류에서 불리하다는 점을 짚을 것.</a:t>
             </a:r>
             <a:endParaRPr lang="en-US" dirty="0"/>
           </a:p>
@@ -782,7 +803,11 @@
           <a:p>
             <a:r>
               <a:rPr lang="en-US" dirty="0"/>
-              <a:t>15분 구간. 과제 마감이 매주 있다는 점을 여기서 못 박는다.</a:t>
+              <a:t>[말할 내용]
+마지막으로 이 수업의 15주를 안내하겠습니다.
+언제 뭘 제출해야 하는지 오늘 알고 가셔야 합니다.
+[운영 메모]
+15분 구간. 과제 마감이 매주 있다는 점을 여기서 못 박는다.</a:t>
             </a:r>
             <a:endParaRPr lang="en-US" dirty="0"/>
           </a:p>
@@ -870,7 +895,14 @@
           <a:p>
             <a:r>
               <a:rPr lang="en-US" dirty="0"/>
-              <a:t>PART I을 건너뛰고 바로 만들고 싶어 하는 학생이 매년 나온다. 1–5주 산출물이 6주차 이후 작업 속도를 좌우한다고 설명할 것.</a:t>
+              <a:t>[말할 내용]
+크게 셋으로 나뉩니다.
+1~5주는 방향 설정과 기획입니다. 뭘 넣을지 정하는 구간이고, 여기서 정한 게 끝까지 갑니다.
+6~10주는 콘텐츠 구조화와 비주얼 시스템입니다. 실제로 페이지를 만듭니다.
+11~15주는 완성과 발표입니다.
+앞에서 정하고, 가운데서 만들고, 뒤에서 끝냅니다. 8주차 중간 발표가 방향을 바꿀 수 있는 마지막 지점입니다.
+[운영 메모]
+PART I을 건너뛰고 바로 만들고 싶어 하는 학생이 매년 나온다. 1–5주 산출물이 6주차 이후 작업 속도를 좌우한다고 설명할 것.</a:t>
             </a:r>
             <a:endParaRPr lang="en-US" dirty="0"/>
           </a:p>
@@ -958,7 +990,13 @@
           <a:p>
             <a:r>
               <a:rPr lang="en-US" dirty="0"/>
-              <a:t>배점표가 아직 없다. 확정되면 이 슬라이드에 채워 넣을 것. 배점 없이 마감만 공지하면 학생들이 불안해하므로 '곧 공지한다'를 분명히 말할 것.</a:t>
+              <a:t>[말할 내용]
+큰 마감이 다섯 개입니다.
+4주차 스토리라인 초안, 8주차 중간 발표, 10주차 페이지 6장, 12주차 온라인 초안, 15주차 최종 포트폴리오와 발표.
+매주 과제는 이것과 별개로 있습니다.
+배점은 학과 기준이 확정되면 공지하겠습니다. 지금 확실한 건, 마지막에 몰아서 할 수 없는 구조라는 것입니다.
+[운영 메모]
+배점표가 아직 없다. 확정되면 이 슬라이드에 채워 넣을 것. 배점 없이 마감만 공지하면 학생들이 불안해하므로 '곧 공지한다'를 분명히 말할 것.</a:t>
             </a:r>
             <a:endParaRPr lang="en-US" dirty="0"/>
           </a:p>
@@ -1046,7 +1084,15 @@
           <a:p>
             <a:r>
               <a:rPr lang="en-US" dirty="0"/>
-              <a:t>이 실습이 없으면 과제를 '예뻐 보이는 것 3개'로 채워 온다. 수업 안에서 기준을 한 번 대보게 하면 2주차 자기 분석의 재료 수준이 달라진다. 온라인이므로 채팅창에 후보를 적게 하면 진행 상황이 바로 보인다.</a:t>
+              <a:t>[말할 내용]
+자, 이제 15분 실습입니다.
+이번 주 과제가 '관심 분야 포트폴리오 3개 스크랩'인데, 집에 가서 빈손으로 시작하면 예뻐 보이는 걸로 채우게 됩니다. 그러니 여기서 후보를 좁혀 놓고 가겠습니다.
+먼저 5분. 기억에 남는 포트폴리오를 이름이나 링크로 여덟 개 이상 적으세요. 좋았는지 나빴는지는 아직 따지지 마시고요. 기억이 안 나면 아까 본 플랫폼에서 바로 찾으셔도 됩니다. 적으신 건 채팅창에도 올려 주세요.
+다음 4분. 웹형·PDF형·인쇄형 셋으로 나눕니다. 한 유형에만 몰려 있으면 다른 유형을 지금 두 개 더 찾으세요. 세 유형이 섞여야 다음 주 비교가 됩니다.
+다음 4분. 오늘 배운 세 기준으로 O/X를 칩니다. 첫인상, 과정이 보이는가, 내 역할이 적혀 있는가. 세 개 다 X인 건 지우세요.
+마지막 2분. 남은 것 중 셋을 고르고 각각 뭐가 좋았는지 한 줄씩 적으세요. 이 세 줄이 과제의 절반입니다.
+[운영 메모]
+이 실습이 없으면 과제를 '예뻐 보이는 것 3개'로 채워 온다. 수업 안에서 기준을 한 번 대보게 하면 2주차 자기 분석의 재료 수준이 달라진다. 온라인이므로 채팅창에 후보를 적게 하면 진행 상황이 바로 보인다.</a:t>
             </a:r>
             <a:endParaRPr lang="en-US" dirty="0"/>
           </a:p>
@@ -1134,7 +1180,13 @@
           <a:p>
             <a:r>
               <a:rPr lang="en-US" dirty="0"/>
-              <a:t>파일명 규칙을 첫 주에 정해두면 학기 내내 관리가 편하다.</a:t>
+              <a:t>[말할 내용]
+과제 체크리스트입니다. 방금 실습에서 절반은 하셨습니다.
+나머지는 링크와 첫 화면 캡처를 남기고, 파일명을 규칙대로 맞추는 것입니다.
+여덟 개 중에 05번이 제일 중요합니다. '예뻐서'가 아니라 구성·서술·비주얼 중 하나를 고르라는 것. 이유를 그 세 단어 중 하나로 쓰셔야 다음 주에 자기 분석의 재료가 됩니다.
+그리고 세 개를 다 비슷한 스타일로 고르면 비교가 안 됩니다. 일부러 다르게 고르세요.
+[운영 메모]
+파일명 규칙을 첫 주에 정해두면 학기 내내 관리가 편하다.</a:t>
             </a:r>
             <a:endParaRPr lang="en-US" dirty="0"/>
           </a:p>
@@ -1222,7 +1274,14 @@
           <a:p>
             <a:r>
               <a:rPr lang="en-US" dirty="0"/>
-              <a:t>3개를 모두 비슷한 그래픽 포트폴리오로 골라오는 경우가 많다. 서로 다른 유형(웹형·PDF형·인쇄형 등)으로 고르라고 예시를 들어 지시할 것.</a:t>
+              <a:t>[말할 내용]
+정리하겠습니다.
+이번 주 과제는 두 가지입니다. 관심 분야 포트폴리오 3개 스크랩, 그리고 각각 왜 골랐는지 한 문장씩. 2주차 수업 시작 전까지 클래스룸에 올려 주세요.
+방금 실습에서 절반은 하셨으니, 집에서는 링크와 캡처를 남기고 이유를 다듬으시면 됩니다.
+다음 주에는 SWOT으로 자기 역량을 분석하고 1:1 상담을 진행합니다. 오늘 고르신 스크랩이 그 재료가 됩니다. 노트북 꼭 준비해 주세요.
+질문 있으신 분?
+[운영 메모]
+3개를 모두 비슷한 그래픽 포트폴리오로 골라오는 경우가 많다. 서로 다른 유형(웹형·PDF형·인쇄형 등)으로 고르라고 예시를 들어 지시할 것.</a:t>
             </a:r>
             <a:endParaRPr lang="en-US" dirty="0"/>
           </a:p>
@@ -1310,7 +1369,12 @@
           <a:p>
             <a:r>
               <a:rPr lang="en-US" dirty="0"/>
-              <a:t>이 과목은 120분이며 온라인이다. 화면만 보는 시간이 길어지므로 중간 휴식 10분을 반드시 지키고, 실습 15분에는 채팅창에 후보를 적게 해 진행 상황을 눈으로 확인한다. 2주차부터 실습과 상담 비중이 커지므로, 첫 주에만 강의가 길다는 점을 미리 말해두면 좋다.</a:t>
+              <a:t>[말할 내용]
+오늘 두 시간은 이렇게 씁니다.
+앞 15분은 과목 안내입니다. 그다음 40분과 30분, 강의 두 덩어리가 있고 사이에 10분 쉽니다. 끝나기 전 15분은 실습입니다 — 오늘 과제인 스크랩을 수업 안에서 미리 시작해 보겠습니다.
+온라인이라 화면만 계속 보면 지치니까 55분 지점에 반드시 쉬겠습니다. 카메라는 켜 두시고, 질문은 채팅으로 아무 때나 주세요. 실습 때도 채팅창을 씁니다.
+[운영 메모]
+이 과목은 120분이며 온라인이다. 화면만 보는 시간이 길어지므로 중간 휴식 10분을 반드시 지키고, 실습 15분에는 채팅창에 후보를 적게 해 진행 상황을 눈으로 확인한다. 2주차부터 실습과 상담 비중이 커지므로, 첫 주에만 강의가 길다는 점을 미리 말해두면 좋다.</a:t>
             </a:r>
             <a:endParaRPr lang="en-US" dirty="0"/>
           </a:p>
@@ -1398,7 +1462,15 @@
           <a:p>
             <a:r>
               <a:rPr lang="en-US" dirty="0"/>
-              <a:t>학생들은 '포트폴리오 = 예쁘게 만드는 것'으로 알고 온다. 오늘의 목적은 그 프레임을 '설득 문서'로 바꾸는 것.</a:t>
+              <a:t>[말할 내용]
+오늘 끝나면 네 가지를 가져가시게 됩니다.
+첫째, 포트폴리오가 채용 과정에서 언제 어떻게 쓰이는지. 서류·면접·배치 세 단계에서 매번 다르게 읽힌다는 걸 아시게 됩니다.
+둘째, 좋은 포트폴리오의 공통 특징 세 가지를 자기 말로 설명할 수 있게 됩니다. 취향이 아니라 기준으로요.
+셋째, 요즘 공고가 실제로 뭘 요구하는지.
+넷째, 이 수업의 15주 흐름과 마감입니다.
+아래 한 줄이 이 수업의 정의입니다. 한 학기 동안 흩어진 작업을 모아, 나를 설명하는 한 벌의 문서로 만든다. '만든다'가 아니라 '나를 설명하는'에 방점이 있습니다.
+[운영 메모]
+학생들은 '포트폴리오 = 예쁘게 만드는 것'으로 알고 온다. 오늘의 목적은 그 프레임을 '설득 문서'로 바꾸는 것.</a:t>
             </a:r>
             <a:endParaRPr lang="en-US" dirty="0"/>
           </a:p>
@@ -1486,7 +1558,11 @@
           <a:p>
             <a:r>
               <a:rPr lang="en-US" dirty="0"/>
-              <a:t>20분 구간.</a:t>
+              <a:t>[말할 내용]
+먼저 만들기 전에, 이게 어디서 어떻게 읽히는지부터 보겠습니다.
+이걸 모르고 만들면 예쁜데 안 읽히는 물건이 나옵니다. 매년 가장 많이 나오는 결과가 그겁니다.
+[운영 메모]
+20분 구간.</a:t>
             </a:r>
             <a:endParaRPr lang="en-US" dirty="0"/>
           </a:p>
@@ -1574,7 +1650,13 @@
           <a:p>
             <a:r>
               <a:rPr lang="en-US" dirty="0"/>
-              <a:t>여기서 학생들에게 물어볼 것 — '여러분이 채용 담당자라면 무엇을 보고 싶겠어요?' 대개 '실력'이라고 답한다. 그 실력을 어떻게 확인하느냐로 이어가면 된다.</a:t>
+              <a:t>[말할 내용]
+오늘 가장 먼저 바꿔야 할 생각입니다.
+포트폴리오는 작품집이 아닙니다. 판단을 돕는 자료입니다.
+작품집은 '내가 이만큼 했다'를 보여 주는 것이고, 판단 자료는 '이 사람을 뽑아도 되는가'에 답하는 것입니다. 목적이 다르면 넣을 것과 뺄 것이 완전히 달라집니다.
+이 문장을 학기 내내 기준으로 쓰겠습니다. 뭘 넣을지 고민될 때마다 여기로 돌아옵니다.
+[운영 메모]
+여기서 학생들에게 물어볼 것 — '여러분이 채용 담당자라면 무엇을 보고 싶겠어요?' 대개 '실력'이라고 답한다. 그 실력을 어떻게 확인하느냐로 이어가면 된다.</a:t>
             </a:r>
             <a:endParaRPr lang="en-US" dirty="0"/>
           </a:p>
@@ -1662,7 +1744,14 @@
           <a:p>
             <a:r>
               <a:rPr lang="en-US" dirty="0"/>
-              <a:t>02가 실질적으로 가장 중요하다. 면접에서 자기 페이지를 설명하지 못하는 지원자가 실제로 많다는 점을 사례로 들 것.</a:t>
+              <a:t>[말할 내용]
+같은 문서인데 읽는 목적이 매번 다릅니다.
+서류 단계에서는 넘길지 말지를 가릅니다. 짧은 시간에 훑으면서 '더 볼 만한가'만 판단합니다. 여기서는 첫 두세 장이 전부입니다.
+면접 단계에서는 질문의 대본이 됩니다. 면접관이 여러분 포트폴리오를 펴놓고 묻습니다. 그러니 설명하지 못할 페이지는 아예 넣지 않는 편이 낫습니다.
+그리고 입사 후에는 배치의 근거가 됩니다. 어느 팀에 둘지, 뭘 잘하는 사람으로 보였는지가 첫 업무를 정합니다.
+오른쪽 검은 카드를 강조하는 이유는, 학생들이 보통 서류 단계만 생각하고 만들기 때문입니다.
+[운영 메모]
+02가 실질적으로 가장 중요하다. 면접에서 자기 페이지를 설명하지 못하는 지원자가 실제로 많다는 점을 사례로 들 것.</a:t>
             </a:r>
             <a:endParaRPr lang="en-US" dirty="0"/>
           </a:p>
@@ -1750,7 +1839,14 @@
           <a:p>
             <a:r>
               <a:rPr lang="en-US" dirty="0"/>
-              <a:t>이 세 기준은 학기 내내 크리틱의 공용 언어로 쓴다. 3주차 벤치마킹에서 다시 쓰인다.</a:t>
+              <a:t>[말할 내용]
+스타일은 다 달라도, 잘된 것들은 이 셋을 공유합니다.
+첫째, 무엇을 하는 사람인지 빨리 보입니다.
+둘째, 판단할 근거가 있습니다. 결과 이미지만 있는 게 아니라 왜 그렇게 결정했는지가 적혀 있습니다.
+셋째, 끝까지 읽힙니다. 분량이 아니라 밀도의 문제입니다.
+이 세 가지가 오늘 실습과 이번 주 과제의 기준이 됩니다. 잠깐 메모해 두세요.
+[운영 메모]
+이 세 기준은 학기 내내 크리틱의 공용 언어로 쓴다. 3주차 벤치마킹에서 다시 쓰인다.</a:t>
             </a:r>
             <a:endParaRPr lang="en-US" dirty="0"/>
           </a:p>
@@ -1838,7 +1934,13 @@
           <a:p>
             <a:r>
               <a:rPr lang="en-US" dirty="0"/>
-              <a:t>왼쪽과 오른쪽이 같은 작업일 수 있다는 점을 반드시 말할 것. 이 대비가 학생들에게 가장 강하게 남는다.</a:t>
+              <a:t>[말할 내용]
+작업의 질이 아니라 서술의 질 차이입니다. 두 개만 짚어 보겠습니다.
+프로젝트 수를 보세요. 3~5개로 각각 다른 강점을 보여 주는 쪽과, 가진 걸 전부 여덟 개 이상 넣은 쪽. 많이 넣으면 성실해 보일 것 같지만 실제로는 '고를 줄 모르는 사람'으로 읽힙니다.
+내 역할 칸도 보세요. '팀 프로젝트'라고만 쓰면 그 프로젝트는 없는 것과 같습니다. 뭘 했는지 안 적혀 있으면 판단할 수가 없으니까요.
+여러분이 이번 학기에 고칠 것의 대부분이 이 오른쪽 열에 있습니다.
+[운영 메모]
+왼쪽과 오른쪽이 같은 작업일 수 있다는 점을 반드시 말할 것. 이 대비가 학생들에게 가장 강하게 남는다.</a:t>
             </a:r>
             <a:endParaRPr lang="en-US" dirty="0"/>
           </a:p>
@@ -1926,7 +2028,11 @@
           <a:p>
             <a:r>
               <a:rPr lang="en-US" dirty="0"/>
-              <a:t>20분 구간. 실제 채용 공고를 한두 개 띄워 함께 읽으면 가장 효과적이다.</a:t>
+              <a:t>[말할 내용]
+이제 요즘 채용 현장에서 실제로 뭘 요구하는지 보겠습니다.
+통계는 아니고, 최근 공고들을 읽어 보면 반복해서 나타나는 것들입니다.
+[운영 메모]
+20분 구간. 실제 채용 공고를 한두 개 띄워 함께 읽으면 가장 효과적이다.</a:t>
             </a:r>
             <a:endParaRPr lang="en-US" dirty="0"/>
           </a:p>
